--- a/skills/presentation-template-library/skills/artifact-template-jade-annual-brief/assets/reference.pptx
+++ b/skills/presentation-template-library/skills/artifact-template-jade-annual-brief/assets/reference.pptx
@@ -445,8 +445,8 @@
           <p:nvPr/>
         </p:nvPicPr>
         <p:blipFill>
-          <a:blip xmlns:r="http://schemas.openxmlformats.org/officeDocument/2006/relationships" xmlns:a="http://schemas.openxmlformats.org/drawingml/2006/main" r:embed="rIdOfficeKitImagec7b73f8fac405495_1"/>
-          <a:srcRect xmlns:a="http://schemas.openxmlformats.org/drawingml/2006/main" l="0" t="34171" r="0" b="34171"/>
+          <a:blip xmlns:r="http://schemas.openxmlformats.org/officeDocument/2006/relationships" xmlns:a="http://schemas.openxmlformats.org/drawingml/2006/main" r:embed="rIdOfficeKitImage33b8c33a8fc3d613_1"/>
+          <a:srcRect xmlns:a="http://schemas.openxmlformats.org/drawingml/2006/main" l="0" t="34180" r="0" b="34180"/>
           <a:stretch xmlns:a="http://schemas.openxmlformats.org/drawingml/2006/main">
             <a:fillRect/>
           </a:stretch>
@@ -6242,7 +6242,7 @@
         </p:xfrm>
         <a:graphic xmlns:a="http://schemas.openxmlformats.org/drawingml/2006/main">
           <a:graphicData uri="http://schemas.openxmlformats.org/drawingml/2006/chart">
-            <c:chart xmlns:r="http://schemas.openxmlformats.org/officeDocument/2006/relationships" xmlns:c="http://schemas.openxmlformats.org/drawingml/2006/chart" r:id="R293f4dc5e41d4312"/>
+            <c:chart xmlns:r="http://schemas.openxmlformats.org/officeDocument/2006/relationships" xmlns:c="http://schemas.openxmlformats.org/drawingml/2006/chart" r:id="R4c7695b312914a8e"/>
           </a:graphicData>
         </a:graphic>
       </p:graphicFrame>
@@ -6260,7 +6260,7 @@
         </p:xfrm>
         <a:graphic xmlns:a="http://schemas.openxmlformats.org/drawingml/2006/main">
           <a:graphicData uri="http://schemas.openxmlformats.org/drawingml/2006/chart">
-            <c:chart xmlns:r="http://schemas.openxmlformats.org/officeDocument/2006/relationships" xmlns:c="http://schemas.openxmlformats.org/drawingml/2006/chart" r:id="Rabf0ae84348d4f30"/>
+            <c:chart xmlns:r="http://schemas.openxmlformats.org/officeDocument/2006/relationships" xmlns:c="http://schemas.openxmlformats.org/drawingml/2006/chart" r:id="R8b29a6c49ea748b4"/>
           </a:graphicData>
         </a:graphic>
       </p:graphicFrame>

--- a/skills/presentation-template-library/skills/artifact-template-jade-annual-brief/assets/reference.pptx
+++ b/skills/presentation-template-library/skills/artifact-template-jade-annual-brief/assets/reference.pptx
@@ -445,7 +445,7 @@
           <p:nvPr/>
         </p:nvPicPr>
         <p:blipFill>
-          <a:blip xmlns:r="http://schemas.openxmlformats.org/officeDocument/2006/relationships" xmlns:a="http://schemas.openxmlformats.org/drawingml/2006/main" r:embed="rIdOfficeKitImage33b8c33a8fc3d613_1"/>
+          <a:blip xmlns:r="http://schemas.openxmlformats.org/officeDocument/2006/relationships" xmlns:a="http://schemas.openxmlformats.org/drawingml/2006/main" r:embed="rIdOfficeKitImage7650495d0c3b8602_1"/>
           <a:srcRect xmlns:a="http://schemas.openxmlformats.org/drawingml/2006/main" l="0" t="34180" r="0" b="34180"/>
           <a:stretch xmlns:a="http://schemas.openxmlformats.org/drawingml/2006/main">
             <a:fillRect/>
@@ -6242,7 +6242,7 @@
         </p:xfrm>
         <a:graphic xmlns:a="http://schemas.openxmlformats.org/drawingml/2006/main">
           <a:graphicData uri="http://schemas.openxmlformats.org/drawingml/2006/chart">
-            <c:chart xmlns:r="http://schemas.openxmlformats.org/officeDocument/2006/relationships" xmlns:c="http://schemas.openxmlformats.org/drawingml/2006/chart" r:id="R4c7695b312914a8e"/>
+            <c:chart xmlns:r="http://schemas.openxmlformats.org/officeDocument/2006/relationships" xmlns:c="http://schemas.openxmlformats.org/drawingml/2006/chart" r:id="Ra1b58be186a1414d"/>
           </a:graphicData>
         </a:graphic>
       </p:graphicFrame>
@@ -6260,7 +6260,7 @@
         </p:xfrm>
         <a:graphic xmlns:a="http://schemas.openxmlformats.org/drawingml/2006/main">
           <a:graphicData uri="http://schemas.openxmlformats.org/drawingml/2006/chart">
-            <c:chart xmlns:r="http://schemas.openxmlformats.org/officeDocument/2006/relationships" xmlns:c="http://schemas.openxmlformats.org/drawingml/2006/chart" r:id="R8b29a6c49ea748b4"/>
+            <c:chart xmlns:r="http://schemas.openxmlformats.org/officeDocument/2006/relationships" xmlns:c="http://schemas.openxmlformats.org/drawingml/2006/chart" r:id="R35fd17a08e3e4fce"/>
           </a:graphicData>
         </a:graphic>
       </p:graphicFrame>

--- a/skills/presentation-template-library/skills/artifact-template-jade-annual-brief/assets/reference.pptx
+++ b/skills/presentation-template-library/skills/artifact-template-jade-annual-brief/assets/reference.pptx
@@ -418,6 +418,16 @@
 <file path=ppt/slides/slide1.xml><?xml version="1.0" encoding="utf-8"?>
 <p:sld xmlns:p="http://schemas.openxmlformats.org/presentationml/2006/main">
   <p:cSld name="Opening claim">
+    <p:bg>
+      <p:bgPr>
+        <a:blipFill xmlns:a="http://schemas.openxmlformats.org/drawingml/2006/main">
+          <a:blip xmlns:r="http://schemas.openxmlformats.org/officeDocument/2006/relationships" r:embed="rIdOfficeKitImage7650495d0c3b8602_1"/>
+          <a:stretch>
+            <a:fillRect/>
+          </a:stretch>
+        </a:blipFill>
+      </p:bgPr>
+    </p:bg>
     <p:spTree>
       <p:nvGrpSpPr>
         <p:cNvPr id="1" name=""/>
@@ -432,38 +442,9 @@
           <a:chExt cx="0" cy="0"/>
         </a:xfrm>
       </p:grpSpPr>
-      <p:pic>
-        <p:nvPicPr>
-          <p:cNvPr id="2" name="artifact-template-jade-annual-brief-cover-field">
-            <a:extLst xmlns:a="http://schemas.openxmlformats.org/drawingml/2006/main">
-              <a:ext uri="{C183D7F6-B498-43B3-948B-1728B52AA6E4}">
-                <adec:decorative xmlns:adec="http://schemas.microsoft.com/office/drawing/2017/decorative" val="1"/>
-              </a:ext>
-            </a:extLst>
-          </p:cNvPr>
-          <p:cNvPicPr/>
-          <p:nvPr/>
-        </p:nvPicPr>
-        <p:blipFill>
-          <a:blip xmlns:r="http://schemas.openxmlformats.org/officeDocument/2006/relationships" xmlns:a="http://schemas.openxmlformats.org/drawingml/2006/main" r:embed="rIdOfficeKitImage7650495d0c3b8602_1"/>
-          <a:srcRect xmlns:a="http://schemas.openxmlformats.org/drawingml/2006/main" l="0" t="34180" r="0" b="34180"/>
-          <a:stretch xmlns:a="http://schemas.openxmlformats.org/drawingml/2006/main">
-            <a:fillRect/>
-          </a:stretch>
-        </p:blipFill>
-        <p:spPr>
-          <a:xfrm xmlns:a="http://schemas.openxmlformats.org/drawingml/2006/main">
-            <a:off x="0" y="0"/>
-            <a:ext cx="15240000" cy="8572500"/>
-          </a:xfrm>
-          <a:prstGeom xmlns:a="http://schemas.openxmlformats.org/drawingml/2006/main" prst="rect">
-            <a:avLst/>
-          </a:prstGeom>
-        </p:spPr>
-      </p:pic>
-      <p:sp>
-        <p:nvSpPr>
-          <p:cNvPr id="3" name="cover-paper-scrim"/>
+      <p:sp>
+        <p:nvSpPr>
+          <p:cNvPr id="2" name="cover-paper-scrim"/>
           <p:cNvSpPr/>
           <p:nvPr/>
         </p:nvSpPr>
@@ -501,7 +482,7 @@
       </p:sp>
       <p:sp>
         <p:nvSpPr>
-          <p:cNvPr id="4" name="fixed-rail"/>
+          <p:cNvPr id="3" name="fixed-rail"/>
           <p:cNvSpPr/>
           <p:nvPr/>
         </p:nvSpPr>
@@ -537,7 +518,7 @@
       </p:sp>
       <p:sp>
         <p:nvSpPr>
-          <p:cNvPr id="5" name="fixed-nav-0"/>
+          <p:cNvPr id="4" name="fixed-nav-0"/>
           <p:cNvSpPr/>
           <p:nvPr/>
         </p:nvSpPr>
@@ -573,7 +554,7 @@
       </p:sp>
       <p:sp>
         <p:nvSpPr>
-          <p:cNvPr id="6" name="fixed-nav-label-0"/>
+          <p:cNvPr id="5" name="fixed-nav-label-0"/>
           <p:cNvSpPr txBox="1"/>
           <p:nvPr/>
         </p:nvSpPr>
@@ -611,7 +592,7 @@
       </p:sp>
       <p:sp>
         <p:nvSpPr>
-          <p:cNvPr id="7" name="fixed-nav-1"/>
+          <p:cNvPr id="6" name="fixed-nav-1"/>
           <p:cNvSpPr/>
           <p:nvPr/>
         </p:nvSpPr>
@@ -647,7 +628,7 @@
       </p:sp>
       <p:sp>
         <p:nvSpPr>
-          <p:cNvPr id="8" name="fixed-nav-label-1"/>
+          <p:cNvPr id="7" name="fixed-nav-label-1"/>
           <p:cNvSpPr txBox="1"/>
           <p:nvPr/>
         </p:nvSpPr>
@@ -685,7 +666,7 @@
       </p:sp>
       <p:sp>
         <p:nvSpPr>
-          <p:cNvPr id="9" name="fixed-nav-2"/>
+          <p:cNvPr id="8" name="fixed-nav-2"/>
           <p:cNvSpPr/>
           <p:nvPr/>
         </p:nvSpPr>
@@ -721,7 +702,7 @@
       </p:sp>
       <p:sp>
         <p:nvSpPr>
-          <p:cNvPr id="10" name="fixed-nav-label-2"/>
+          <p:cNvPr id="9" name="fixed-nav-label-2"/>
           <p:cNvSpPr txBox="1"/>
           <p:nvPr/>
         </p:nvSpPr>
@@ -759,7 +740,7 @@
       </p:sp>
       <p:sp>
         <p:nvSpPr>
-          <p:cNvPr id="11" name="fixed-nav-3"/>
+          <p:cNvPr id="10" name="fixed-nav-3"/>
           <p:cNvSpPr/>
           <p:nvPr/>
         </p:nvSpPr>
@@ -795,7 +776,7 @@
       </p:sp>
       <p:sp>
         <p:nvSpPr>
-          <p:cNvPr id="12" name="fixed-nav-label-3"/>
+          <p:cNvPr id="11" name="fixed-nav-label-3"/>
           <p:cNvSpPr txBox="1"/>
           <p:nvPr/>
         </p:nvSpPr>
@@ -833,7 +814,7 @@
       </p:sp>
       <p:sp>
         <p:nvSpPr>
-          <p:cNvPr id="13" name="fixed-nav-4"/>
+          <p:cNvPr id="12" name="fixed-nav-4"/>
           <p:cNvSpPr/>
           <p:nvPr/>
         </p:nvSpPr>
@@ -869,7 +850,7 @@
       </p:sp>
       <p:sp>
         <p:nvSpPr>
-          <p:cNvPr id="14" name="fixed-nav-label-4"/>
+          <p:cNvPr id="13" name="fixed-nav-label-4"/>
           <p:cNvSpPr txBox="1"/>
           <p:nvPr/>
         </p:nvSpPr>
@@ -907,7 +888,7 @@
       </p:sp>
       <p:sp>
         <p:nvSpPr>
-          <p:cNvPr id="15" name="top-rule"/>
+          <p:cNvPr id="14" name="top-rule"/>
           <p:cNvSpPr/>
           <p:nvPr/>
         </p:nvSpPr>
@@ -941,7 +922,7 @@
       </p:sp>
       <p:sp>
         <p:nvSpPr>
-          <p:cNvPr id="16" name="eyebrow"/>
+          <p:cNvPr id="15" name="eyebrow"/>
           <p:cNvSpPr txBox="1"/>
           <p:nvPr/>
         </p:nvSpPr>
@@ -978,7 +959,7 @@
       </p:sp>
       <p:sp>
         <p:nvSpPr>
-          <p:cNvPr id="17" name="cover-title"/>
+          <p:cNvPr id="16" name="cover-title"/>
           <p:cNvSpPr txBox="1"/>
           <p:nvPr/>
         </p:nvSpPr>
@@ -1015,7 +996,7 @@
       </p:sp>
       <p:sp>
         <p:nvSpPr>
-          <p:cNvPr id="18" name="cover-subtitle"/>
+          <p:cNvPr id="17" name="cover-subtitle"/>
           <p:cNvSpPr txBox="1"/>
           <p:nvPr/>
         </p:nvSpPr>
@@ -1052,7 +1033,7 @@
       </p:sp>
       <p:sp>
         <p:nvSpPr>
-          <p:cNvPr id="19" name="cover-rule"/>
+          <p:cNvPr id="18" name="cover-rule"/>
           <p:cNvSpPr/>
           <p:nvPr/>
         </p:nvSpPr>
@@ -1086,7 +1067,7 @@
       </p:sp>
       <p:sp>
         <p:nvSpPr>
-          <p:cNvPr id="20" name="cover-basis"/>
+          <p:cNvPr id="19" name="cover-basis"/>
           <p:cNvSpPr txBox="1"/>
           <p:nvPr/>
         </p:nvSpPr>
@@ -1123,7 +1104,7 @@
       </p:sp>
       <p:sp>
         <p:nvSpPr>
-          <p:cNvPr id="21" name="cover-thesis"/>
+          <p:cNvPr id="20" name="cover-thesis"/>
           <p:cNvSpPr txBox="1"/>
           <p:nvPr/>
         </p:nvSpPr>
@@ -1160,7 +1141,7 @@
       </p:sp>
       <p:sp>
         <p:nvSpPr>
-          <p:cNvPr id="22" name="cover-source"/>
+          <p:cNvPr id="21" name="cover-source"/>
           <p:cNvSpPr txBox="1"/>
           <p:nvPr/>
         </p:nvSpPr>
@@ -1197,7 +1178,7 @@
       </p:sp>
       <p:sp>
         <p:nvSpPr>
-          <p:cNvPr id="23" name="page-number"/>
+          <p:cNvPr id="22" name="page-number"/>
           <p:cNvSpPr txBox="1"/>
           <p:nvPr/>
         </p:nvSpPr>
@@ -1235,7 +1216,7 @@
       </p:sp>
       <p:sp>
         <p:nvSpPr>
-          <p:cNvPr id="24" name="anchor-field"/>
+          <p:cNvPr id="23" name="anchor-field"/>
           <p:cNvSpPr/>
           <p:nvPr/>
         </p:nvSpPr>
@@ -1271,7 +1252,7 @@
       </p:sp>
       <p:sp>
         <p:nvSpPr>
-          <p:cNvPr id="25" name="anchor-grid-0-0"/>
+          <p:cNvPr id="24" name="anchor-grid-0-0"/>
           <p:cNvSpPr/>
           <p:nvPr/>
         </p:nvSpPr>
@@ -1307,7 +1288,7 @@
       </p:sp>
       <p:sp>
         <p:nvSpPr>
-          <p:cNvPr id="26" name="anchor-grid-0-1"/>
+          <p:cNvPr id="25" name="anchor-grid-0-1"/>
           <p:cNvSpPr/>
           <p:nvPr/>
         </p:nvSpPr>
@@ -1343,7 +1324,7 @@
       </p:sp>
       <p:sp>
         <p:nvSpPr>
-          <p:cNvPr id="27" name="anchor-grid-0-2"/>
+          <p:cNvPr id="26" name="anchor-grid-0-2"/>
           <p:cNvSpPr/>
           <p:nvPr/>
         </p:nvSpPr>
@@ -1379,7 +1360,7 @@
       </p:sp>
       <p:sp>
         <p:nvSpPr>
-          <p:cNvPr id="28" name="anchor-grid-1-0"/>
+          <p:cNvPr id="27" name="anchor-grid-1-0"/>
           <p:cNvSpPr/>
           <p:nvPr/>
         </p:nvSpPr>
@@ -1415,7 +1396,7 @@
       </p:sp>
       <p:sp>
         <p:nvSpPr>
-          <p:cNvPr id="29" name="anchor-grid-1-1"/>
+          <p:cNvPr id="28" name="anchor-grid-1-1"/>
           <p:cNvSpPr/>
           <p:nvPr/>
         </p:nvSpPr>
@@ -1451,7 +1432,7 @@
       </p:sp>
       <p:sp>
         <p:nvSpPr>
-          <p:cNvPr id="30" name="anchor-grid-1-2"/>
+          <p:cNvPr id="29" name="anchor-grid-1-2"/>
           <p:cNvSpPr/>
           <p:nvPr/>
         </p:nvSpPr>
@@ -1487,7 +1468,7 @@
       </p:sp>
       <p:sp>
         <p:nvSpPr>
-          <p:cNvPr id="31" name="anchor-grid-2-0"/>
+          <p:cNvPr id="30" name="anchor-grid-2-0"/>
           <p:cNvSpPr/>
           <p:nvPr/>
         </p:nvSpPr>
@@ -1523,7 +1504,7 @@
       </p:sp>
       <p:sp>
         <p:nvSpPr>
-          <p:cNvPr id="32" name="anchor-grid-2-1"/>
+          <p:cNvPr id="31" name="anchor-grid-2-1"/>
           <p:cNvSpPr/>
           <p:nvPr/>
         </p:nvSpPr>
@@ -1559,7 +1540,7 @@
       </p:sp>
       <p:sp>
         <p:nvSpPr>
-          <p:cNvPr id="33" name="anchor-grid-2-2"/>
+          <p:cNvPr id="32" name="anchor-grid-2-2"/>
           <p:cNvSpPr/>
           <p:nvPr/>
         </p:nvSpPr>
@@ -1595,7 +1576,7 @@
       </p:sp>
       <p:sp>
         <p:nvSpPr>
-          <p:cNvPr id="34" name="anchor-axis"/>
+          <p:cNvPr id="33" name="anchor-axis"/>
           <p:cNvSpPr/>
           <p:nvPr/>
         </p:nvSpPr>
@@ -6242,7 +6223,7 @@
         </p:xfrm>
         <a:graphic xmlns:a="http://schemas.openxmlformats.org/drawingml/2006/main">
           <a:graphicData uri="http://schemas.openxmlformats.org/drawingml/2006/chart">
-            <c:chart xmlns:r="http://schemas.openxmlformats.org/officeDocument/2006/relationships" xmlns:c="http://schemas.openxmlformats.org/drawingml/2006/chart" r:id="Ra1b58be186a1414d"/>
+            <c:chart xmlns:r="http://schemas.openxmlformats.org/officeDocument/2006/relationships" xmlns:c="http://schemas.openxmlformats.org/drawingml/2006/chart" r:id="R86e2f1ddedec4dca"/>
           </a:graphicData>
         </a:graphic>
       </p:graphicFrame>
@@ -6260,7 +6241,7 @@
         </p:xfrm>
         <a:graphic xmlns:a="http://schemas.openxmlformats.org/drawingml/2006/main">
           <a:graphicData uri="http://schemas.openxmlformats.org/drawingml/2006/chart">
-            <c:chart xmlns:r="http://schemas.openxmlformats.org/officeDocument/2006/relationships" xmlns:c="http://schemas.openxmlformats.org/drawingml/2006/chart" r:id="R35fd17a08e3e4fce"/>
+            <c:chart xmlns:r="http://schemas.openxmlformats.org/officeDocument/2006/relationships" xmlns:c="http://schemas.openxmlformats.org/drawingml/2006/chart" r:id="Rc4d968485980451d"/>
           </a:graphicData>
         </a:graphic>
       </p:graphicFrame>

--- a/skills/presentation-template-library/skills/artifact-template-jade-annual-brief/assets/reference.pptx
+++ b/skills/presentation-template-library/skills/artifact-template-jade-annual-brief/assets/reference.pptx
@@ -194,234 +194,13 @@
 </a:theme>
 </file>
 
-<file path=ppt/slides/charts/chart1.xml><?xml version="1.0" encoding="utf-8"?>
-<c:chartSpace xmlns:c="http://schemas.openxmlformats.org/drawingml/2006/chart" xmlns:a="http://schemas.openxmlformats.org/drawingml/2006/main">
-  <c:chart>
-    <c:title>
-      <c:tx>
-        <c:rich>
-          <a:bodyPr/>
-          <a:lstStyle/>
-          <a:p>
-            <a:r>
-              <a:t>Observed signal</a:t>
-            </a:r>
-          </a:p>
-        </c:rich>
-      </c:tx>
-      <c:layout/>
-    </c:title>
-    <c:plotArea>
-      <c:layout/>
-      <c:barChart>
-        <c:barDir val="col"/>
-        <c:grouping val="clustered"/>
-        <c:ser>
-          <c:idx val="0"/>
-          <c:order val="0"/>
-          <c:tx>
-            <c:v>Observed</c:v>
-          </c:tx>
-          <c:spPr>
-            <a:solidFill>
-              <a:srgbClr val="B7A530"/>
-            </a:solidFill>
-          </c:spPr>
-          <c:cat>
-            <c:strLit>
-              <c:ptCount val="6"/>
-              <c:pt idx="0">
-                <c:v>A</c:v>
-              </c:pt>
-              <c:pt idx="1">
-                <c:v>B</c:v>
-              </c:pt>
-              <c:pt idx="2">
-                <c:v>C</c:v>
-              </c:pt>
-              <c:pt idx="3">
-                <c:v>D</c:v>
-              </c:pt>
-              <c:pt idx="4">
-                <c:v>E</c:v>
-              </c:pt>
-              <c:pt idx="5">
-                <c:v>F</c:v>
-              </c:pt>
-            </c:strLit>
-          </c:cat>
-          <c:val>
-            <c:numLit>
-              <c:formatCode>General</c:formatCode>
-              <c:ptCount val="6"/>
-              <c:pt idx="0">
-                <c:v>38</c:v>
-              </c:pt>
-              <c:pt idx="1">
-                <c:v>46</c:v>
-              </c:pt>
-              <c:pt idx="2">
-                <c:v>43</c:v>
-              </c:pt>
-              <c:pt idx="3">
-                <c:v>58</c:v>
-              </c:pt>
-              <c:pt idx="4">
-                <c:v>68</c:v>
-              </c:pt>
-              <c:pt idx="5">
-                <c:v>74</c:v>
-              </c:pt>
-            </c:numLit>
-          </c:val>
-        </c:ser>
-        <c:axId val="1"/>
-        <c:axId val="2"/>
-      </c:barChart>
-      <c:catAx>
-        <c:axId val="1"/>
-        <c:scaling>
-          <c:orientation val="minMax"/>
-        </c:scaling>
-        <c:axPos val="b"/>
-        <c:crossAx val="2"/>
-      </c:catAx>
-      <c:valAx>
-        <c:axId val="2"/>
-        <c:scaling>
-          <c:orientation val="minMax"/>
-        </c:scaling>
-        <c:axPos val="l"/>
-        <c:crossAx val="1"/>
-      </c:valAx>
-    </c:plotArea>
-    <c:plotVisOnly val="1"/>
-  </c:chart>
-</c:chartSpace>
-</file>
-
-<file path=ppt/slides/charts/chart2.xml><?xml version="1.0" encoding="utf-8"?>
-<c:chartSpace xmlns:c="http://schemas.openxmlformats.org/drawingml/2006/chart" xmlns:a="http://schemas.openxmlformats.org/drawingml/2006/main">
-  <c:chart>
-    <c:title>
-      <c:tx>
-        <c:rich>
-          <a:bodyPr/>
-          <a:lstStyle/>
-          <a:p>
-            <a:r>
-              <a:t>Context</a:t>
-            </a:r>
-          </a:p>
-        </c:rich>
-      </c:tx>
-      <c:layout/>
-    </c:title>
-    <c:plotArea>
-      <c:layout/>
-      <c:lineChart>
-        <c:grouping val="standard"/>
-        <c:ser>
-          <c:idx val="0"/>
-          <c:order val="0"/>
-          <c:tx>
-            <c:v>Context</c:v>
-          </c:tx>
-          <c:spPr>
-            <a:solidFill>
-              <a:srgbClr val="6B7E65"/>
-            </a:solidFill>
-            <a:ln w="38100">
-              <a:solidFill>
-                <a:srgbClr val="6B7E65"/>
-              </a:solidFill>
-              <a:prstDash val="solid"/>
-            </a:ln>
-          </c:spPr>
-          <c:marker>
-            <c:symbol val="circle"/>
-            <c:size val="6"/>
-          </c:marker>
-          <c:cat>
-            <c:strLit>
-              <c:ptCount val="6"/>
-              <c:pt idx="0">
-                <c:v>A</c:v>
-              </c:pt>
-              <c:pt idx="1">
-                <c:v>B</c:v>
-              </c:pt>
-              <c:pt idx="2">
-                <c:v>C</c:v>
-              </c:pt>
-              <c:pt idx="3">
-                <c:v>D</c:v>
-              </c:pt>
-              <c:pt idx="4">
-                <c:v>E</c:v>
-              </c:pt>
-              <c:pt idx="5">
-                <c:v>F</c:v>
-              </c:pt>
-            </c:strLit>
-          </c:cat>
-          <c:val>
-            <c:numLit>
-              <c:formatCode>General</c:formatCode>
-              <c:ptCount val="6"/>
-              <c:pt idx="0">
-                <c:v>34</c:v>
-              </c:pt>
-              <c:pt idx="1">
-                <c:v>39</c:v>
-              </c:pt>
-              <c:pt idx="2">
-                <c:v>41</c:v>
-              </c:pt>
-              <c:pt idx="3">
-                <c:v>45</c:v>
-              </c:pt>
-              <c:pt idx="4">
-                <c:v>49</c:v>
-              </c:pt>
-              <c:pt idx="5">
-                <c:v>52</c:v>
-              </c:pt>
-            </c:numLit>
-          </c:val>
-        </c:ser>
-        <c:axId val="1"/>
-        <c:axId val="2"/>
-      </c:lineChart>
-      <c:catAx>
-        <c:axId val="1"/>
-        <c:scaling>
-          <c:orientation val="minMax"/>
-        </c:scaling>
-        <c:axPos val="b"/>
-        <c:crossAx val="2"/>
-      </c:catAx>
-      <c:valAx>
-        <c:axId val="2"/>
-        <c:scaling>
-          <c:orientation val="minMax"/>
-        </c:scaling>
-        <c:axPos val="l"/>
-        <c:crossAx val="1"/>
-      </c:valAx>
-    </c:plotArea>
-    <c:plotVisOnly val="1"/>
-  </c:chart>
-</c:chartSpace>
-</file>
-
 <file path=ppt/slides/slide1.xml><?xml version="1.0" encoding="utf-8"?>
 <p:sld xmlns:p="http://schemas.openxmlformats.org/presentationml/2006/main">
   <p:cSld name="Opening claim">
     <p:bg>
       <p:bgPr>
         <a:blipFill xmlns:a="http://schemas.openxmlformats.org/drawingml/2006/main">
-          <a:blip xmlns:r="http://schemas.openxmlformats.org/officeDocument/2006/relationships" r:embed="rIdOfficeKitImage7650495d0c3b8602_1"/>
+          <a:blip xmlns:r="http://schemas.openxmlformats.org/officeDocument/2006/relationships" r:embed="rIdOfficeKitImagec237998db8bee20d_1"/>
           <a:stretch>
             <a:fillRect/>
           </a:stretch>
@@ -5574,6 +5353,16 @@
 <file path=ppt/slides/slide5.xml><?xml version="1.0" encoding="utf-8"?>
 <p:sld xmlns:p="http://schemas.openxmlformats.org/presentationml/2006/main">
   <p:cSld name="Visual carrier">
+    <p:bg>
+      <p:bgPr>
+        <a:blipFill xmlns:a="http://schemas.openxmlformats.org/drawingml/2006/main">
+          <a:blip xmlns:r="http://schemas.openxmlformats.org/officeDocument/2006/relationships" r:embed="rIdOfficeKitImage2930549abca3ae00_1"/>
+          <a:stretch>
+            <a:fillRect/>
+          </a:stretch>
+        </a:blipFill>
+      </p:bgPr>
+    </p:bg>
     <p:spTree>
       <p:nvGrpSpPr>
         <p:cNvPr id="1" name=""/>
@@ -5996,20 +5785,22 @@
       </p:sp>
       <p:sp>
         <p:nvSpPr>
-          <p:cNvPr id="13" name="background"/>
+          <p:cNvPr id="13" name="section-reading-plane"/>
           <p:cNvSpPr/>
           <p:nvPr/>
         </p:nvSpPr>
         <p:spPr>
           <a:xfrm xmlns:a="http://schemas.openxmlformats.org/drawingml/2006/main">
             <a:off x="0" y="0"/>
-            <a:ext cx="15240000" cy="8572500"/>
+            <a:ext cx="7810500" cy="8572500"/>
           </a:xfrm>
           <a:prstGeom xmlns:a="http://schemas.openxmlformats.org/drawingml/2006/main" prst="rect">
             <a:avLst/>
           </a:prstGeom>
           <a:solidFill xmlns:a="http://schemas.openxmlformats.org/drawingml/2006/main">
-            <a:srgbClr val="F2F0E7"/>
+            <a:srgbClr val="F2F0E7">
+              <a:alpha val="94000"/>
+            </a:srgbClr>
           </a:solidFill>
           <a:ln xmlns:a="http://schemas.openxmlformats.org/drawingml/2006/main" w="0">
             <a:solidFill>
@@ -6032,14 +5823,88 @@
       </p:sp>
       <p:sp>
         <p:nvSpPr>
-          <p:cNvPr id="14" name="visual-top-rule"/>
-          <p:cNvSpPr/>
-          <p:nvPr/>
-        </p:nvSpPr>
-        <p:spPr>
-          <a:xfrm xmlns:a="http://schemas.openxmlformats.org/drawingml/2006/main">
-            <a:off x="838200" y="666750"/>
-            <a:ext cx="13563600" cy="0"/>
+          <p:cNvPr id="14" name="section-eyebrow"/>
+          <p:cNvSpPr txBox="1"/>
+          <p:nvPr/>
+        </p:nvSpPr>
+        <p:spPr>
+          <a:xfrm xmlns:a="http://schemas.openxmlformats.org/drawingml/2006/main">
+            <a:off x="914400" y="914400"/>
+            <a:ext cx="6096000" cy="228600"/>
+          </a:xfrm>
+          <a:prstGeom xmlns:a="http://schemas.openxmlformats.org/drawingml/2006/main" prst="rect">
+            <a:avLst/>
+          </a:prstGeom>
+          <a:noFill xmlns:a="http://schemas.openxmlformats.org/drawingml/2006/main"/>
+          <a:ln xmlns:a="http://schemas.openxmlformats.org/drawingml/2006/main" w="0">
+            <a:noFill/>
+          </a:ln>
+        </p:spPr>
+        <p:txBody>
+          <a:bodyPr xmlns:a="http://schemas.openxmlformats.org/drawingml/2006/main" wrap="square" lIns="0" tIns="0" rIns="0" bIns="0" anchor="t"/>
+          <a:lstStyle xmlns:a="http://schemas.openxmlformats.org/drawingml/2006/main"/>
+          <a:p xmlns:a="http://schemas.openxmlformats.org/drawingml/2006/main">
+            <a:r>
+              <a:rPr lang="en-US" sz="1200" b="1">
+                <a:solidFill>
+                  <a:srgbClr val="B7A530"/>
+                </a:solidFill>
+                <a:latin typeface="Tahoma"/>
+                <a:ea typeface="Tahoma"/>
+              </a:rPr>
+              <a:t>JADE ANNUAL BRIEF · SECTION</a:t>
+            </a:r>
+            <a:endParaRPr lang="en-US"/>
+          </a:p>
+        </p:txBody>
+      </p:sp>
+      <p:sp>
+        <p:nvSpPr>
+          <p:cNvPr id="15" name="section-title"/>
+          <p:cNvSpPr txBox="1"/>
+          <p:nvPr/>
+        </p:nvSpPr>
+        <p:spPr>
+          <a:xfrm xmlns:a="http://schemas.openxmlformats.org/drawingml/2006/main">
+            <a:off x="914400" y="1657350"/>
+            <a:ext cx="5905500" cy="1162050"/>
+          </a:xfrm>
+          <a:prstGeom xmlns:a="http://schemas.openxmlformats.org/drawingml/2006/main" prst="rect">
+            <a:avLst/>
+          </a:prstGeom>
+          <a:noFill xmlns:a="http://schemas.openxmlformats.org/drawingml/2006/main"/>
+          <a:ln xmlns:a="http://schemas.openxmlformats.org/drawingml/2006/main" w="0">
+            <a:noFill/>
+          </a:ln>
+        </p:spPr>
+        <p:txBody>
+          <a:bodyPr xmlns:a="http://schemas.openxmlformats.org/drawingml/2006/main" wrap="square" lIns="0" tIns="0" rIns="0" bIns="0" anchor="t"/>
+          <a:lstStyle xmlns:a="http://schemas.openxmlformats.org/drawingml/2006/main"/>
+          <a:p xmlns:a="http://schemas.openxmlformats.org/drawingml/2006/main">
+            <a:r>
+              <a:rPr lang="en-US" sz="3450" b="1">
+                <a:solidFill>
+                  <a:srgbClr val="222222"/>
+                </a:solidFill>
+                <a:latin typeface="Tahoma"/>
+                <a:ea typeface="Tahoma"/>
+              </a:rPr>
+              <a:t>Show the operating shape</a:t>
+            </a:r>
+            <a:endParaRPr lang="en-US"/>
+          </a:p>
+        </p:txBody>
+      </p:sp>
+      <p:sp>
+        <p:nvSpPr>
+          <p:cNvPr id="16" name="section-rule"/>
+          <p:cNvSpPr/>
+          <p:nvPr/>
+        </p:nvSpPr>
+        <p:spPr>
+          <a:xfrm xmlns:a="http://schemas.openxmlformats.org/drawingml/2006/main">
+            <a:off x="914400" y="3181350"/>
+            <a:ext cx="4991100" cy="0"/>
           </a:xfrm>
           <a:prstGeom xmlns:a="http://schemas.openxmlformats.org/drawingml/2006/main" prst="line">
             <a:avLst/>
@@ -6066,335 +5931,118 @@
       </p:sp>
       <p:sp>
         <p:nvSpPr>
-          <p:cNvPr id="15" name="JADE ANNUAL BRIEF · VISUAL CARRIER"/>
-          <p:cNvSpPr txBox="1"/>
-          <p:nvPr/>
-        </p:nvSpPr>
-        <p:spPr>
-          <a:xfrm xmlns:a="http://schemas.openxmlformats.org/drawingml/2006/main">
-            <a:off x="914400" y="895350"/>
-            <a:ext cx="7239000" cy="228600"/>
-          </a:xfrm>
-          <a:prstGeom xmlns:a="http://schemas.openxmlformats.org/drawingml/2006/main" prst="rect">
-            <a:avLst/>
-          </a:prstGeom>
-          <a:noFill xmlns:a="http://schemas.openxmlformats.org/drawingml/2006/main"/>
-          <a:ln xmlns:a="http://schemas.openxmlformats.org/drawingml/2006/main" w="0">
-            <a:noFill/>
-          </a:ln>
-        </p:spPr>
-        <p:txBody>
-          <a:bodyPr xmlns:a="http://schemas.openxmlformats.org/drawingml/2006/main" wrap="square" lIns="0" tIns="0" rIns="0" bIns="0" anchor="t"/>
-          <a:lstStyle xmlns:a="http://schemas.openxmlformats.org/drawingml/2006/main"/>
-          <a:p xmlns:a="http://schemas.openxmlformats.org/drawingml/2006/main">
-            <a:r>
-              <a:rPr lang="en-US" sz="1200" b="1">
+          <p:cNvPr id="17" name="section-body"/>
+          <p:cNvSpPr txBox="1"/>
+          <p:nvPr/>
+        </p:nvSpPr>
+        <p:spPr>
+          <a:xfrm xmlns:a="http://schemas.openxmlformats.org/drawingml/2006/main">
+            <a:off x="914400" y="3600450"/>
+            <a:ext cx="5334000" cy="819150"/>
+          </a:xfrm>
+          <a:prstGeom xmlns:a="http://schemas.openxmlformats.org/drawingml/2006/main" prst="rect">
+            <a:avLst/>
+          </a:prstGeom>
+          <a:noFill xmlns:a="http://schemas.openxmlformats.org/drawingml/2006/main"/>
+          <a:ln xmlns:a="http://schemas.openxmlformats.org/drawingml/2006/main" w="0">
+            <a:noFill/>
+          </a:ln>
+        </p:spPr>
+        <p:txBody>
+          <a:bodyPr xmlns:a="http://schemas.openxmlformats.org/drawingml/2006/main" wrap="square" lIns="0" tIns="0" rIns="0" bIns="0" anchor="t"/>
+          <a:lstStyle xmlns:a="http://schemas.openxmlformats.org/drawingml/2006/main"/>
+          <a:p xmlns:a="http://schemas.openxmlformats.org/drawingml/2006/main">
+            <a:r>
+              <a:rPr lang="en-US" sz="1800">
+                <a:solidFill>
+                  <a:srgbClr val="222222"/>
+                </a:solidFill>
+                <a:latin typeface="Tahoma"/>
+                <a:ea typeface="Tahoma"/>
+              </a:rPr>
+              <a:t>An operating page should reveal the shape of the work, not decorate the status.</a:t>
+            </a:r>
+            <a:endParaRPr lang="en-US"/>
+          </a:p>
+        </p:txBody>
+      </p:sp>
+      <p:sp>
+        <p:nvSpPr>
+          <p:cNvPr id="18" name="section-note"/>
+          <p:cNvSpPr txBox="1"/>
+          <p:nvPr/>
+        </p:nvSpPr>
+        <p:spPr>
+          <a:xfrm xmlns:a="http://schemas.openxmlformats.org/drawingml/2006/main">
+            <a:off x="914400" y="5238750"/>
+            <a:ext cx="5334000" cy="228600"/>
+          </a:xfrm>
+          <a:prstGeom xmlns:a="http://schemas.openxmlformats.org/drawingml/2006/main" prst="rect">
+            <a:avLst/>
+          </a:prstGeom>
+          <a:noFill xmlns:a="http://schemas.openxmlformats.org/drawingml/2006/main"/>
+          <a:ln xmlns:a="http://schemas.openxmlformats.org/drawingml/2006/main" w="0">
+            <a:noFill/>
+          </a:ln>
+        </p:spPr>
+        <p:txBody>
+          <a:bodyPr xmlns:a="http://schemas.openxmlformats.org/drawingml/2006/main" wrap="square" lIns="0" tIns="0" rIns="0" bIns="0" anchor="t"/>
+          <a:lstStyle xmlns:a="http://schemas.openxmlformats.org/drawingml/2006/main"/>
+          <a:p xmlns:a="http://schemas.openxmlformats.org/drawingml/2006/main">
+            <a:r>
+              <a:rPr lang="en-US" sz="1125" b="1">
                 <a:solidFill>
                   <a:srgbClr val="B7A530"/>
                 </a:solidFill>
                 <a:latin typeface="Tahoma"/>
                 <a:ea typeface="Tahoma"/>
               </a:rPr>
-              <a:t>JADE ANNUAL BRIEF · VISUAL CARRIER</a:t>
-            </a:r>
-            <a:endParaRPr lang="en-US"/>
-          </a:p>
-        </p:txBody>
-      </p:sp>
-      <p:sp>
-        <p:nvSpPr>
-          <p:cNvPr id="16" name="visual-title"/>
-          <p:cNvSpPr txBox="1"/>
-          <p:nvPr/>
-        </p:nvSpPr>
-        <p:spPr>
-          <a:xfrm xmlns:a="http://schemas.openxmlformats.org/drawingml/2006/main">
-            <a:off x="914400" y="1314450"/>
-            <a:ext cx="11811000" cy="552450"/>
-          </a:xfrm>
-          <a:prstGeom xmlns:a="http://schemas.openxmlformats.org/drawingml/2006/main" prst="rect">
-            <a:avLst/>
-          </a:prstGeom>
-          <a:noFill xmlns:a="http://schemas.openxmlformats.org/drawingml/2006/main"/>
-          <a:ln xmlns:a="http://schemas.openxmlformats.org/drawingml/2006/main" w="0">
-            <a:noFill/>
-          </a:ln>
-        </p:spPr>
-        <p:txBody>
-          <a:bodyPr xmlns:a="http://schemas.openxmlformats.org/drawingml/2006/main" wrap="square" lIns="0" tIns="0" rIns="0" bIns="0" anchor="t"/>
-          <a:lstStyle xmlns:a="http://schemas.openxmlformats.org/drawingml/2006/main"/>
-          <a:p xmlns:a="http://schemas.openxmlformats.org/drawingml/2006/main">
-            <a:r>
-              <a:rPr lang="en-US" sz="2850" b="1">
+              <a:t>ONE IMAGE · ONE THESIS · ONE TURN</a:t>
+            </a:r>
+            <a:endParaRPr lang="en-US"/>
+          </a:p>
+        </p:txBody>
+      </p:sp>
+      <p:sp>
+        <p:nvSpPr>
+          <p:cNvPr id="19" name="section-next"/>
+          <p:cNvSpPr txBox="1"/>
+          <p:nvPr/>
+        </p:nvSpPr>
+        <p:spPr>
+          <a:xfrm xmlns:a="http://schemas.openxmlformats.org/drawingml/2006/main">
+            <a:off x="914400" y="5772150"/>
+            <a:ext cx="5334000" cy="476250"/>
+          </a:xfrm>
+          <a:prstGeom xmlns:a="http://schemas.openxmlformats.org/drawingml/2006/main" prst="rect">
+            <a:avLst/>
+          </a:prstGeom>
+          <a:noFill xmlns:a="http://schemas.openxmlformats.org/drawingml/2006/main"/>
+          <a:ln xmlns:a="http://schemas.openxmlformats.org/drawingml/2006/main" w="0">
+            <a:noFill/>
+          </a:ln>
+        </p:spPr>
+        <p:txBody>
+          <a:bodyPr xmlns:a="http://schemas.openxmlformats.org/drawingml/2006/main" wrap="square" lIns="0" tIns="0" rIns="0" bIns="0" anchor="t"/>
+          <a:lstStyle xmlns:a="http://schemas.openxmlformats.org/drawingml/2006/main"/>
+          <a:p xmlns:a="http://schemas.openxmlformats.org/drawingml/2006/main">
+            <a:r>
+              <a:rPr lang="en-US" sz="2100" b="1">
                 <a:solidFill>
                   <a:srgbClr val="222222"/>
                 </a:solidFill>
                 <a:latin typeface="Tahoma"/>
                 <a:ea typeface="Tahoma"/>
               </a:rPr>
-              <a:t>Show the operating shape</a:t>
-            </a:r>
-            <a:endParaRPr lang="en-US"/>
-          </a:p>
-        </p:txBody>
-      </p:sp>
-      <p:sp>
-        <p:nvSpPr>
-          <p:cNvPr id="17" name="visual-body"/>
-          <p:cNvSpPr txBox="1"/>
-          <p:nvPr/>
-        </p:nvSpPr>
-        <p:spPr>
-          <a:xfrm xmlns:a="http://schemas.openxmlformats.org/drawingml/2006/main">
-            <a:off x="952500" y="1981200"/>
-            <a:ext cx="10477500" cy="266700"/>
-          </a:xfrm>
-          <a:prstGeom xmlns:a="http://schemas.openxmlformats.org/drawingml/2006/main" prst="rect">
-            <a:avLst/>
-          </a:prstGeom>
-          <a:noFill xmlns:a="http://schemas.openxmlformats.org/drawingml/2006/main"/>
-          <a:ln xmlns:a="http://schemas.openxmlformats.org/drawingml/2006/main" w="0">
-            <a:noFill/>
-          </a:ln>
-        </p:spPr>
-        <p:txBody>
-          <a:bodyPr xmlns:a="http://schemas.openxmlformats.org/drawingml/2006/main" wrap="square" lIns="0" tIns="0" rIns="0" bIns="0" anchor="t"/>
-          <a:lstStyle xmlns:a="http://schemas.openxmlformats.org/drawingml/2006/main"/>
-          <a:p xmlns:a="http://schemas.openxmlformats.org/drawingml/2006/main">
-            <a:r>
-              <a:rPr lang="en-US" sz="1350">
-                <a:solidFill>
-                  <a:srgbClr val="8E8D88"/>
-                </a:solidFill>
-                <a:latin typeface="Tahoma"/>
-                <a:ea typeface="Tahoma"/>
-              </a:rPr>
-              <a:t>An operating page should reveal the shape of the work, not decorate the status.</a:t>
-            </a:r>
-            <a:endParaRPr lang="en-US"/>
-          </a:p>
-        </p:txBody>
-      </p:sp>
-      <p:sp>
-        <p:nvSpPr>
-          <p:cNvPr id="18" name="visual-rule"/>
-          <p:cNvSpPr/>
-          <p:nvPr/>
-        </p:nvSpPr>
-        <p:spPr>
-          <a:xfrm xmlns:a="http://schemas.openxmlformats.org/drawingml/2006/main">
-            <a:off x="914400" y="2457450"/>
-            <a:ext cx="13411200" cy="0"/>
-          </a:xfrm>
-          <a:prstGeom xmlns:a="http://schemas.openxmlformats.org/drawingml/2006/main" prst="line">
-            <a:avLst/>
-          </a:prstGeom>
-          <a:noFill xmlns:a="http://schemas.openxmlformats.org/drawingml/2006/main"/>
-          <a:ln xmlns:a="http://schemas.openxmlformats.org/drawingml/2006/main" w="25400">
-            <a:solidFill>
-              <a:srgbClr val="8E8D88"/>
-            </a:solidFill>
-            <a:prstDash val="solid"/>
-          </a:ln>
-        </p:spPr>
-        <p:txBody>
-          <a:bodyPr xmlns:a="http://schemas.openxmlformats.org/drawingml/2006/main" wrap="square" lIns="0" tIns="0" rIns="0" bIns="0" anchor="t"/>
-          <a:lstStyle xmlns:a="http://schemas.openxmlformats.org/drawingml/2006/main"/>
-          <a:p xmlns:a="http://schemas.openxmlformats.org/drawingml/2006/main">
-            <a:r>
-              <a:rPr lang="en-US"/>
-              <a:t/>
-            </a:r>
-            <a:endParaRPr lang="en-US"/>
-          </a:p>
-        </p:txBody>
-      </p:sp>
-      <p:graphicFrame>
-        <p:nvGraphicFramePr>
-          <p:cNvPr id="19" name="dense-visual-bars"/>
-          <p:cNvGraphicFramePr>
-            <a:graphicFrameLocks xmlns:a="http://schemas.openxmlformats.org/drawingml/2006/main" noGrp="1"/>
-          </p:cNvGraphicFramePr>
-          <p:nvPr/>
-        </p:nvGraphicFramePr>
-        <p:xfrm>
-          <a:off xmlns:a="http://schemas.openxmlformats.org/drawingml/2006/main" x="914400" y="3028950"/>
-          <a:ext xmlns:a="http://schemas.openxmlformats.org/drawingml/2006/main" cx="5334000" cy="3143250"/>
-        </p:xfrm>
-        <a:graphic xmlns:a="http://schemas.openxmlformats.org/drawingml/2006/main">
-          <a:graphicData uri="http://schemas.openxmlformats.org/drawingml/2006/chart">
-            <c:chart xmlns:r="http://schemas.openxmlformats.org/officeDocument/2006/relationships" xmlns:c="http://schemas.openxmlformats.org/drawingml/2006/chart" r:id="R86e2f1ddedec4dca"/>
-          </a:graphicData>
-        </a:graphic>
-      </p:graphicFrame>
-      <p:graphicFrame>
-        <p:nvGraphicFramePr>
-          <p:cNvPr id="20" name="dense-visual-line"/>
-          <p:cNvGraphicFramePr>
-            <a:graphicFrameLocks xmlns:a="http://schemas.openxmlformats.org/drawingml/2006/main" noGrp="1"/>
-          </p:cNvGraphicFramePr>
-          <p:nvPr/>
-        </p:nvGraphicFramePr>
-        <p:xfrm>
-          <a:off xmlns:a="http://schemas.openxmlformats.org/drawingml/2006/main" x="6667500" y="3028950"/>
-          <a:ext xmlns:a="http://schemas.openxmlformats.org/drawingml/2006/main" cx="3810000" cy="3143250"/>
-        </p:xfrm>
-        <a:graphic xmlns:a="http://schemas.openxmlformats.org/drawingml/2006/main">
-          <a:graphicData uri="http://schemas.openxmlformats.org/drawingml/2006/chart">
-            <c:chart xmlns:r="http://schemas.openxmlformats.org/officeDocument/2006/relationships" xmlns:c="http://schemas.openxmlformats.org/drawingml/2006/chart" r:id="Rc4d968485980451d"/>
-          </a:graphicData>
-        </a:graphic>
-      </p:graphicFrame>
-      <p:sp>
-        <p:nvSpPr>
-          <p:cNvPr id="21" name="visual-note"/>
-          <p:cNvSpPr/>
-          <p:nvPr/>
-        </p:nvSpPr>
-        <p:spPr>
-          <a:xfrm xmlns:a="http://schemas.openxmlformats.org/drawingml/2006/main">
-            <a:off x="11049000" y="3333750"/>
-            <a:ext cx="3048000" cy="2381250"/>
-          </a:xfrm>
-          <a:prstGeom xmlns:a="http://schemas.openxmlformats.org/drawingml/2006/main" prst="rect">
-            <a:avLst/>
-          </a:prstGeom>
-          <a:solidFill xmlns:a="http://schemas.openxmlformats.org/drawingml/2006/main">
-            <a:srgbClr val="F3F5F8"/>
-          </a:solidFill>
-          <a:ln xmlns:a="http://schemas.openxmlformats.org/drawingml/2006/main" w="12700">
-            <a:solidFill>
-              <a:srgbClr val="8E8D88"/>
-            </a:solidFill>
-            <a:prstDash val="solid"/>
-          </a:ln>
-        </p:spPr>
-        <p:txBody>
-          <a:bodyPr xmlns:a="http://schemas.openxmlformats.org/drawingml/2006/main" wrap="square" lIns="0" tIns="0" rIns="0" bIns="0" anchor="t"/>
-          <a:lstStyle xmlns:a="http://schemas.openxmlformats.org/drawingml/2006/main"/>
-          <a:p xmlns:a="http://schemas.openxmlformats.org/drawingml/2006/main">
-            <a:r>
-              <a:rPr lang="en-US"/>
-              <a:t/>
-            </a:r>
-            <a:endParaRPr lang="en-US"/>
-          </a:p>
-        </p:txBody>
-      </p:sp>
-      <p:sp>
-        <p:nvSpPr>
-          <p:cNvPr id="22" name="visual-note-label"/>
-          <p:cNvSpPr txBox="1"/>
-          <p:nvPr/>
-        </p:nvSpPr>
-        <p:spPr>
-          <a:xfrm xmlns:a="http://schemas.openxmlformats.org/drawingml/2006/main">
-            <a:off x="11430000" y="3695700"/>
-            <a:ext cx="2286000" cy="228600"/>
-          </a:xfrm>
-          <a:prstGeom xmlns:a="http://schemas.openxmlformats.org/drawingml/2006/main" prst="rect">
-            <a:avLst/>
-          </a:prstGeom>
-          <a:noFill xmlns:a="http://schemas.openxmlformats.org/drawingml/2006/main"/>
-          <a:ln xmlns:a="http://schemas.openxmlformats.org/drawingml/2006/main" w="0">
-            <a:noFill/>
-          </a:ln>
-        </p:spPr>
-        <p:txBody>
-          <a:bodyPr xmlns:a="http://schemas.openxmlformats.org/drawingml/2006/main" wrap="square" lIns="0" tIns="0" rIns="0" bIns="0" anchor="t"/>
-          <a:lstStyle xmlns:a="http://schemas.openxmlformats.org/drawingml/2006/main"/>
-          <a:p xmlns:a="http://schemas.openxmlformats.org/drawingml/2006/main">
-            <a:r>
-              <a:rPr lang="en-US" sz="1125" b="1">
-                <a:solidFill>
-                  <a:srgbClr val="B7A530"/>
-                </a:solidFill>
-                <a:latin typeface="Tahoma"/>
-                <a:ea typeface="Tahoma"/>
-              </a:rPr>
-              <a:t>CARRIER</a:t>
-            </a:r>
-            <a:endParaRPr lang="en-US"/>
-          </a:p>
-        </p:txBody>
-      </p:sp>
-      <p:sp>
-        <p:nvSpPr>
-          <p:cNvPr id="23" name="visual-note-text"/>
-          <p:cNvSpPr txBox="1"/>
-          <p:nvPr/>
-        </p:nvSpPr>
-        <p:spPr>
-          <a:xfrm xmlns:a="http://schemas.openxmlformats.org/drawingml/2006/main">
-            <a:off x="11430000" y="4171950"/>
-            <a:ext cx="2286000" cy="723900"/>
-          </a:xfrm>
-          <a:prstGeom xmlns:a="http://schemas.openxmlformats.org/drawingml/2006/main" prst="rect">
-            <a:avLst/>
-          </a:prstGeom>
-          <a:noFill xmlns:a="http://schemas.openxmlformats.org/drawingml/2006/main"/>
-          <a:ln xmlns:a="http://schemas.openxmlformats.org/drawingml/2006/main" w="0">
-            <a:noFill/>
-          </a:ln>
-        </p:spPr>
-        <p:txBody>
-          <a:bodyPr xmlns:a="http://schemas.openxmlformats.org/drawingml/2006/main" wrap="square" lIns="0" tIns="0" rIns="0" bIns="0" anchor="t"/>
-          <a:lstStyle xmlns:a="http://schemas.openxmlformats.org/drawingml/2006/main"/>
-          <a:p xmlns:a="http://schemas.openxmlformats.org/drawingml/2006/main">
-            <a:r>
-              <a:rPr lang="en-US" sz="2100" b="1">
-                <a:solidFill>
-                  <a:srgbClr val="222222"/>
-                </a:solidFill>
-                <a:latin typeface="Tahoma"/>
-                <a:ea typeface="Tahoma"/>
-              </a:rPr>
-              <a:t>Exception before polish</a:t>
-            </a:r>
-            <a:endParaRPr lang="en-US"/>
-          </a:p>
-        </p:txBody>
-      </p:sp>
-      <p:sp>
-        <p:nvSpPr>
-          <p:cNvPr id="24" name="visual-note-foot"/>
-          <p:cNvSpPr txBox="1"/>
-          <p:nvPr/>
-        </p:nvSpPr>
-        <p:spPr>
-          <a:xfrm xmlns:a="http://schemas.openxmlformats.org/drawingml/2006/main">
-            <a:off x="11430000" y="5219700"/>
-            <a:ext cx="2286000" cy="457200"/>
-          </a:xfrm>
-          <a:prstGeom xmlns:a="http://schemas.openxmlformats.org/drawingml/2006/main" prst="rect">
-            <a:avLst/>
-          </a:prstGeom>
-          <a:noFill xmlns:a="http://schemas.openxmlformats.org/drawingml/2006/main"/>
-          <a:ln xmlns:a="http://schemas.openxmlformats.org/drawingml/2006/main" w="0">
-            <a:noFill/>
-          </a:ln>
-        </p:spPr>
-        <p:txBody>
-          <a:bodyPr xmlns:a="http://schemas.openxmlformats.org/drawingml/2006/main" wrap="square" lIns="0" tIns="0" rIns="0" bIns="0" anchor="t"/>
-          <a:lstStyle xmlns:a="http://schemas.openxmlformats.org/drawingml/2006/main"/>
-          <a:p xmlns:a="http://schemas.openxmlformats.org/drawingml/2006/main">
-            <a:r>
-              <a:rPr lang="en-US" sz="1200">
-                <a:solidFill>
-                  <a:srgbClr val="8E8D88"/>
-                </a:solidFill>
-                <a:latin typeface="Tahoma"/>
-                <a:ea typeface="Tahoma"/>
-              </a:rPr>
-              <a:t>Read the mark, unit, and basis.</a:t>
-            </a:r>
-            <a:endParaRPr lang="en-US"/>
-          </a:p>
-        </p:txBody>
-      </p:sp>
-      <p:sp>
-        <p:nvSpPr>
-          <p:cNvPr id="25" name="source"/>
+              <a:t>Assign the handoff</a:t>
+            </a:r>
+            <a:endParaRPr lang="en-US"/>
+          </a:p>
+        </p:txBody>
+      </p:sp>
+      <p:sp>
+        <p:nvSpPr>
+          <p:cNvPr id="20" name="source"/>
           <p:cNvSpPr txBox="1"/>
           <p:nvPr/>
         </p:nvSpPr>
@@ -6431,7 +6079,7 @@
       </p:sp>
       <p:sp>
         <p:nvSpPr>
-          <p:cNvPr id="26" name="page-number"/>
+          <p:cNvPr id="21" name="page-number"/>
           <p:cNvSpPr txBox="1"/>
           <p:nvPr/>
         </p:nvSpPr>

--- a/skills/presentation-template-library/skills/artifact-template-jade-annual-brief/assets/reference.pptx
+++ b/skills/presentation-template-library/skills/artifact-template-jade-annual-brief/assets/reference.pptx
@@ -200,7 +200,7 @@
     <p:bg>
       <p:bgPr>
         <a:blipFill xmlns:a="http://schemas.openxmlformats.org/drawingml/2006/main">
-          <a:blip xmlns:r="http://schemas.openxmlformats.org/officeDocument/2006/relationships" r:embed="rIdOfficeKitImagec237998db8bee20d_1"/>
+          <a:blip xmlns:r="http://schemas.openxmlformats.org/officeDocument/2006/relationships" r:embed="rIdOfficeKitImage2930549abca3ae00_1"/>
           <a:stretch>
             <a:fillRect/>
           </a:stretch>
@@ -5356,7 +5356,7 @@
     <p:bg>
       <p:bgPr>
         <a:blipFill xmlns:a="http://schemas.openxmlformats.org/drawingml/2006/main">
-          <a:blip xmlns:r="http://schemas.openxmlformats.org/officeDocument/2006/relationships" r:embed="rIdOfficeKitImage2930549abca3ae00_1"/>
+          <a:blip xmlns:r="http://schemas.openxmlformats.org/officeDocument/2006/relationships" r:embed="rIdOfficeKitImage026be3a43029630d_1"/>
           <a:stretch>
             <a:fillRect/>
           </a:stretch>

--- a/skills/presentation-template-library/skills/artifact-template-jade-annual-brief/assets/reference.pptx
+++ b/skills/presentation-template-library/skills/artifact-template-jade-annual-brief/assets/reference.pptx
@@ -4649,58 +4649,159 @@
       </p:sp>
       <p:sp>
         <p:nvSpPr>
-          <p:cNvPr id="19" name="operating-label-0"/>
-          <p:cNvSpPr txBox="1"/>
-          <p:nvPr/>
-        </p:nvSpPr>
-        <p:spPr>
-          <a:xfrm xmlns:a="http://schemas.openxmlformats.org/drawingml/2006/main">
-            <a:off x="1104900" y="3333750"/>
-            <a:ext cx="1809750" cy="228600"/>
-          </a:xfrm>
-          <a:prstGeom xmlns:a="http://schemas.openxmlformats.org/drawingml/2006/main" prst="rect">
-            <a:avLst/>
-          </a:prstGeom>
-          <a:noFill xmlns:a="http://schemas.openxmlformats.org/drawingml/2006/main"/>
-          <a:ln xmlns:a="http://schemas.openxmlformats.org/drawingml/2006/main" w="0">
-            <a:noFill/>
-          </a:ln>
-        </p:spPr>
-        <p:txBody>
-          <a:bodyPr xmlns:a="http://schemas.openxmlformats.org/drawingml/2006/main" wrap="square" lIns="0" tIns="0" rIns="0" bIns="0" anchor="t"/>
-          <a:lstStyle xmlns:a="http://schemas.openxmlformats.org/drawingml/2006/main"/>
-          <a:p xmlns:a="http://schemas.openxmlformats.org/drawingml/2006/main">
-            <a:r>
-              <a:rPr lang="en-US" sz="1125" b="1">
+          <p:cNvPr id="19" name="event-period-0"/>
+          <p:cNvSpPr txBox="1"/>
+          <p:nvPr/>
+        </p:nvSpPr>
+        <p:spPr>
+          <a:xfrm xmlns:a="http://schemas.openxmlformats.org/drawingml/2006/main">
+            <a:off x="990600" y="3162300"/>
+            <a:ext cx="3181350" cy="323850"/>
+          </a:xfrm>
+          <a:prstGeom xmlns:a="http://schemas.openxmlformats.org/drawingml/2006/main" prst="rect">
+            <a:avLst/>
+          </a:prstGeom>
+          <a:noFill xmlns:a="http://schemas.openxmlformats.org/drawingml/2006/main"/>
+          <a:ln xmlns:a="http://schemas.openxmlformats.org/drawingml/2006/main" w="0">
+            <a:noFill/>
+          </a:ln>
+        </p:spPr>
+        <p:txBody>
+          <a:bodyPr xmlns:a="http://schemas.openxmlformats.org/drawingml/2006/main" wrap="square" lIns="0" tIns="0" rIns="0" bIns="0" anchor="t"/>
+          <a:lstStyle xmlns:a="http://schemas.openxmlformats.org/drawingml/2006/main"/>
+          <a:p xmlns:a="http://schemas.openxmlformats.org/drawingml/2006/main">
+            <a:r>
+              <a:rPr lang="en-US" sz="2100" b="1">
+                <a:solidFill>
+                  <a:srgbClr val="222222"/>
+                </a:solidFill>
+                <a:latin typeface="Tahoma"/>
+                <a:ea typeface="Tahoma"/>
+              </a:rPr>
+              <a:t>2019</a:t>
+            </a:r>
+            <a:endParaRPr lang="en-US"/>
+          </a:p>
+        </p:txBody>
+      </p:sp>
+      <p:sp>
+        <p:nvSpPr>
+          <p:cNvPr id="20" name="event-title-0"/>
+          <p:cNvSpPr txBox="1"/>
+          <p:nvPr/>
+        </p:nvSpPr>
+        <p:spPr>
+          <a:xfrm xmlns:a="http://schemas.openxmlformats.org/drawingml/2006/main">
+            <a:off x="990600" y="3562350"/>
+            <a:ext cx="3181350" cy="247650"/>
+          </a:xfrm>
+          <a:prstGeom xmlns:a="http://schemas.openxmlformats.org/drawingml/2006/main" prst="rect">
+            <a:avLst/>
+          </a:prstGeom>
+          <a:noFill xmlns:a="http://schemas.openxmlformats.org/drawingml/2006/main"/>
+          <a:ln xmlns:a="http://schemas.openxmlformats.org/drawingml/2006/main" w="0">
+            <a:noFill/>
+          </a:ln>
+        </p:spPr>
+        <p:txBody>
+          <a:bodyPr xmlns:a="http://schemas.openxmlformats.org/drawingml/2006/main" wrap="square" lIns="0" tIns="0" rIns="0" bIns="0" anchor="t"/>
+          <a:lstStyle xmlns:a="http://schemas.openxmlformats.org/drawingml/2006/main"/>
+          <a:p xmlns:a="http://schemas.openxmlformats.org/drawingml/2006/main">
+            <a:r>
+              <a:rPr lang="en-US" sz="1275" b="1">
+                <a:solidFill>
+                  <a:srgbClr val="222222"/>
+                </a:solidFill>
+                <a:latin typeface="Tahoma"/>
+                <a:ea typeface="Tahoma"/>
+              </a:rPr>
+              <a:t>First signal</a:t>
+            </a:r>
+            <a:endParaRPr lang="en-US"/>
+          </a:p>
+        </p:txBody>
+      </p:sp>
+      <p:sp>
+        <p:nvSpPr>
+          <p:cNvPr id="21" name="event-text-0"/>
+          <p:cNvSpPr txBox="1"/>
+          <p:nvPr/>
+        </p:nvSpPr>
+        <p:spPr>
+          <a:xfrm xmlns:a="http://schemas.openxmlformats.org/drawingml/2006/main">
+            <a:off x="990600" y="3905250"/>
+            <a:ext cx="3181350" cy="628650"/>
+          </a:xfrm>
+          <a:prstGeom xmlns:a="http://schemas.openxmlformats.org/drawingml/2006/main" prst="rect">
+            <a:avLst/>
+          </a:prstGeom>
+          <a:noFill xmlns:a="http://schemas.openxmlformats.org/drawingml/2006/main"/>
+          <a:ln xmlns:a="http://schemas.openxmlformats.org/drawingml/2006/main" w="0">
+            <a:noFill/>
+          </a:ln>
+        </p:spPr>
+        <p:txBody>
+          <a:bodyPr xmlns:a="http://schemas.openxmlformats.org/drawingml/2006/main" wrap="square" lIns="0" tIns="0" rIns="0" bIns="0" anchor="t"/>
+          <a:lstStyle xmlns:a="http://schemas.openxmlformats.org/drawingml/2006/main"/>
+          <a:p xmlns:a="http://schemas.openxmlformats.org/drawingml/2006/main">
+            <a:r>
+              <a:rPr lang="en-US" sz="1125">
                 <a:solidFill>
                   <a:srgbClr val="8E8D88"/>
                 </a:solidFill>
                 <a:latin typeface="Tahoma"/>
                 <a:ea typeface="Tahoma"/>
               </a:rPr>
-              <a:t>NOW</a:t>
-            </a:r>
-            <a:endParaRPr lang="en-US"/>
-          </a:p>
-        </p:txBody>
-      </p:sp>
-      <p:sp>
-        <p:nvSpPr>
-          <p:cNvPr id="20" name="operating-bar-0"/>
+              <a:t>A small operating change makes the hidden pattern visible.</a:t>
+            </a:r>
+            <a:endParaRPr lang="en-US"/>
+          </a:p>
+        </p:txBody>
+      </p:sp>
+      <p:pic>
+        <p:nvPicPr>
+          <p:cNvPr id="22" name="event-photo-0">
+            <a:extLst xmlns:a="http://schemas.openxmlformats.org/drawingml/2006/main">
+              <a:ext uri="{C183D7F6-B498-43B3-948B-1728B52AA6E4}">
+                <adec:decorative xmlns:adec="http://schemas.microsoft.com/office/drawing/2017/decorative" val="1"/>
+              </a:ext>
+            </a:extLst>
+          </p:cNvPr>
+          <p:cNvPicPr/>
+          <p:nvPr/>
+        </p:nvPicPr>
+        <p:blipFill>
+          <a:blip xmlns:r="http://schemas.openxmlformats.org/officeDocument/2006/relationships" xmlns:a="http://schemas.openxmlformats.org/drawingml/2006/main" r:embed="rIdOfficeKitImage026be3a43029630d_1"/>
+          <a:srcRect xmlns:a="http://schemas.openxmlformats.org/drawingml/2006/main" l="0" t="34001" r="0" b="34001"/>
+          <a:stretch xmlns:a="http://schemas.openxmlformats.org/drawingml/2006/main">
+            <a:fillRect/>
+          </a:stretch>
+        </p:blipFill>
+        <p:spPr>
+          <a:xfrm xmlns:a="http://schemas.openxmlformats.org/drawingml/2006/main">
+            <a:off x="990600" y="4914900"/>
+            <a:ext cx="3181350" cy="1809750"/>
+          </a:xfrm>
+          <a:prstGeom xmlns:a="http://schemas.openxmlformats.org/drawingml/2006/main" prst="rect">
+            <a:avLst/>
+          </a:prstGeom>
+        </p:spPr>
+      </p:pic>
+      <p:sp>
+        <p:nvSpPr>
+          <p:cNvPr id="23" name="event-rule-0"/>
           <p:cNvSpPr/>
           <p:nvPr/>
         </p:nvSpPr>
         <p:spPr>
           <a:xfrm xmlns:a="http://schemas.openxmlformats.org/drawingml/2006/main">
-            <a:off x="1104900" y="3848100"/>
-            <a:ext cx="2095500" cy="323850"/>
-          </a:xfrm>
-          <a:prstGeom xmlns:a="http://schemas.openxmlformats.org/drawingml/2006/main" prst="rect">
-            <a:avLst/>
-          </a:prstGeom>
-          <a:solidFill xmlns:a="http://schemas.openxmlformats.org/drawingml/2006/main">
-            <a:srgbClr val="F3F5F8"/>
-          </a:solidFill>
+            <a:off x="990600" y="6934200"/>
+            <a:ext cx="3181350" cy="0"/>
+          </a:xfrm>
+          <a:prstGeom xmlns:a="http://schemas.openxmlformats.org/drawingml/2006/main" prst="line">
+            <a:avLst/>
+          </a:prstGeom>
+          <a:noFill xmlns:a="http://schemas.openxmlformats.org/drawingml/2006/main"/>
           <a:ln xmlns:a="http://schemas.openxmlformats.org/drawingml/2006/main" w="12700">
             <a:solidFill>
               <a:srgbClr val="8E8D88"/>
@@ -4722,131 +4823,159 @@
       </p:sp>
       <p:sp>
         <p:nvSpPr>
-          <p:cNvPr id="21" name="operating-fill-0"/>
+          <p:cNvPr id="24" name="event-period-1"/>
+          <p:cNvSpPr txBox="1"/>
+          <p:nvPr/>
+        </p:nvSpPr>
+        <p:spPr>
+          <a:xfrm xmlns:a="http://schemas.openxmlformats.org/drawingml/2006/main">
+            <a:off x="4343400" y="3162300"/>
+            <a:ext cx="3181350" cy="323850"/>
+          </a:xfrm>
+          <a:prstGeom xmlns:a="http://schemas.openxmlformats.org/drawingml/2006/main" prst="rect">
+            <a:avLst/>
+          </a:prstGeom>
+          <a:noFill xmlns:a="http://schemas.openxmlformats.org/drawingml/2006/main"/>
+          <a:ln xmlns:a="http://schemas.openxmlformats.org/drawingml/2006/main" w="0">
+            <a:noFill/>
+          </a:ln>
+        </p:spPr>
+        <p:txBody>
+          <a:bodyPr xmlns:a="http://schemas.openxmlformats.org/drawingml/2006/main" wrap="square" lIns="0" tIns="0" rIns="0" bIns="0" anchor="t"/>
+          <a:lstStyle xmlns:a="http://schemas.openxmlformats.org/drawingml/2006/main"/>
+          <a:p xmlns:a="http://schemas.openxmlformats.org/drawingml/2006/main">
+            <a:r>
+              <a:rPr lang="en-US" sz="2100" b="1">
+                <a:solidFill>
+                  <a:srgbClr val="222222"/>
+                </a:solidFill>
+                <a:latin typeface="Tahoma"/>
+                <a:ea typeface="Tahoma"/>
+              </a:rPr>
+              <a:t>2021</a:t>
+            </a:r>
+            <a:endParaRPr lang="en-US"/>
+          </a:p>
+        </p:txBody>
+      </p:sp>
+      <p:sp>
+        <p:nvSpPr>
+          <p:cNvPr id="25" name="event-title-1"/>
+          <p:cNvSpPr txBox="1"/>
+          <p:nvPr/>
+        </p:nvSpPr>
+        <p:spPr>
+          <a:xfrm xmlns:a="http://schemas.openxmlformats.org/drawingml/2006/main">
+            <a:off x="4343400" y="3562350"/>
+            <a:ext cx="3181350" cy="247650"/>
+          </a:xfrm>
+          <a:prstGeom xmlns:a="http://schemas.openxmlformats.org/drawingml/2006/main" prst="rect">
+            <a:avLst/>
+          </a:prstGeom>
+          <a:noFill xmlns:a="http://schemas.openxmlformats.org/drawingml/2006/main"/>
+          <a:ln xmlns:a="http://schemas.openxmlformats.org/drawingml/2006/main" w="0">
+            <a:noFill/>
+          </a:ln>
+        </p:spPr>
+        <p:txBody>
+          <a:bodyPr xmlns:a="http://schemas.openxmlformats.org/drawingml/2006/main" wrap="square" lIns="0" tIns="0" rIns="0" bIns="0" anchor="t"/>
+          <a:lstStyle xmlns:a="http://schemas.openxmlformats.org/drawingml/2006/main"/>
+          <a:p xmlns:a="http://schemas.openxmlformats.org/drawingml/2006/main">
+            <a:r>
+              <a:rPr lang="en-US" sz="1275" b="1">
+                <a:solidFill>
+                  <a:srgbClr val="222222"/>
+                </a:solidFill>
+                <a:latin typeface="Tahoma"/>
+                <a:ea typeface="Tahoma"/>
+              </a:rPr>
+              <a:t>Proof point</a:t>
+            </a:r>
+            <a:endParaRPr lang="en-US"/>
+          </a:p>
+        </p:txBody>
+      </p:sp>
+      <p:sp>
+        <p:nvSpPr>
+          <p:cNvPr id="26" name="event-text-1"/>
+          <p:cNvSpPr txBox="1"/>
+          <p:nvPr/>
+        </p:nvSpPr>
+        <p:spPr>
+          <a:xfrm xmlns:a="http://schemas.openxmlformats.org/drawingml/2006/main">
+            <a:off x="4343400" y="3905250"/>
+            <a:ext cx="3181350" cy="628650"/>
+          </a:xfrm>
+          <a:prstGeom xmlns:a="http://schemas.openxmlformats.org/drawingml/2006/main" prst="rect">
+            <a:avLst/>
+          </a:prstGeom>
+          <a:noFill xmlns:a="http://schemas.openxmlformats.org/drawingml/2006/main"/>
+          <a:ln xmlns:a="http://schemas.openxmlformats.org/drawingml/2006/main" w="0">
+            <a:noFill/>
+          </a:ln>
+        </p:spPr>
+        <p:txBody>
+          <a:bodyPr xmlns:a="http://schemas.openxmlformats.org/drawingml/2006/main" wrap="square" lIns="0" tIns="0" rIns="0" bIns="0" anchor="t"/>
+          <a:lstStyle xmlns:a="http://schemas.openxmlformats.org/drawingml/2006/main"/>
+          <a:p xmlns:a="http://schemas.openxmlformats.org/drawingml/2006/main">
+            <a:r>
+              <a:rPr lang="en-US" sz="1125">
+                <a:solidFill>
+                  <a:srgbClr val="8E8D88"/>
+                </a:solidFill>
+                <a:latin typeface="Tahoma"/>
+                <a:ea typeface="Tahoma"/>
+              </a:rPr>
+              <a:t>The repeatable practice earns a place in the annual rhythm.</a:t>
+            </a:r>
+            <a:endParaRPr lang="en-US"/>
+          </a:p>
+        </p:txBody>
+      </p:sp>
+      <p:pic>
+        <p:nvPicPr>
+          <p:cNvPr id="27" name="event-photo-1">
+            <a:extLst xmlns:a="http://schemas.openxmlformats.org/drawingml/2006/main">
+              <a:ext uri="{C183D7F6-B498-43B3-948B-1728B52AA6E4}">
+                <adec:decorative xmlns:adec="http://schemas.microsoft.com/office/drawing/2017/decorative" val="1"/>
+              </a:ext>
+            </a:extLst>
+          </p:cNvPr>
+          <p:cNvPicPr/>
+          <p:nvPr/>
+        </p:nvPicPr>
+        <p:blipFill>
+          <a:blip xmlns:r="http://schemas.openxmlformats.org/officeDocument/2006/relationships" xmlns:a="http://schemas.openxmlformats.org/drawingml/2006/main" r:embed="rIdOfficeKitImage083106afebc7d419_1"/>
+          <a:srcRect xmlns:a="http://schemas.openxmlformats.org/drawingml/2006/main" l="0" t="34001" r="0" b="34001"/>
+          <a:stretch xmlns:a="http://schemas.openxmlformats.org/drawingml/2006/main">
+            <a:fillRect/>
+          </a:stretch>
+        </p:blipFill>
+        <p:spPr>
+          <a:xfrm xmlns:a="http://schemas.openxmlformats.org/drawingml/2006/main">
+            <a:off x="4343400" y="4914900"/>
+            <a:ext cx="3181350" cy="1809750"/>
+          </a:xfrm>
+          <a:prstGeom xmlns:a="http://schemas.openxmlformats.org/drawingml/2006/main" prst="rect">
+            <a:avLst/>
+          </a:prstGeom>
+        </p:spPr>
+      </p:pic>
+      <p:sp>
+        <p:nvSpPr>
+          <p:cNvPr id="28" name="event-rule-1"/>
           <p:cNvSpPr/>
           <p:nvPr/>
         </p:nvSpPr>
         <p:spPr>
           <a:xfrm xmlns:a="http://schemas.openxmlformats.org/drawingml/2006/main">
-            <a:off x="1104900" y="3848100"/>
-            <a:ext cx="1133475" cy="323850"/>
-          </a:xfrm>
-          <a:prstGeom xmlns:a="http://schemas.openxmlformats.org/drawingml/2006/main" prst="rect">
-            <a:avLst/>
-          </a:prstGeom>
-          <a:solidFill xmlns:a="http://schemas.openxmlformats.org/drawingml/2006/main">
-            <a:srgbClr val="B7A530"/>
-          </a:solidFill>
-          <a:ln xmlns:a="http://schemas.openxmlformats.org/drawingml/2006/main" w="0">
-            <a:solidFill>
-              <a:srgbClr val="B7A530"/>
-            </a:solidFill>
-            <a:prstDash val="solid"/>
-          </a:ln>
-        </p:spPr>
-        <p:txBody>
-          <a:bodyPr xmlns:a="http://schemas.openxmlformats.org/drawingml/2006/main" wrap="square" lIns="0" tIns="0" rIns="0" bIns="0" anchor="t"/>
-          <a:lstStyle xmlns:a="http://schemas.openxmlformats.org/drawingml/2006/main"/>
-          <a:p xmlns:a="http://schemas.openxmlformats.org/drawingml/2006/main">
-            <a:r>
-              <a:rPr lang="en-US"/>
-              <a:t/>
-            </a:r>
-            <a:endParaRPr lang="en-US"/>
-          </a:p>
-        </p:txBody>
-      </p:sp>
-      <p:sp>
-        <p:nvSpPr>
-          <p:cNvPr id="22" name="operating-value-0"/>
-          <p:cNvSpPr txBox="1"/>
-          <p:nvPr/>
-        </p:nvSpPr>
-        <p:spPr>
-          <a:xfrm xmlns:a="http://schemas.openxmlformats.org/drawingml/2006/main">
-            <a:off x="1104900" y="4400550"/>
-            <a:ext cx="2095500" cy="419100"/>
-          </a:xfrm>
-          <a:prstGeom xmlns:a="http://schemas.openxmlformats.org/drawingml/2006/main" prst="rect">
-            <a:avLst/>
-          </a:prstGeom>
-          <a:noFill xmlns:a="http://schemas.openxmlformats.org/drawingml/2006/main"/>
-          <a:ln xmlns:a="http://schemas.openxmlformats.org/drawingml/2006/main" w="0">
-            <a:noFill/>
-          </a:ln>
-        </p:spPr>
-        <p:txBody>
-          <a:bodyPr xmlns:a="http://schemas.openxmlformats.org/drawingml/2006/main" wrap="square" lIns="0" tIns="0" rIns="0" bIns="0" anchor="t"/>
-          <a:lstStyle xmlns:a="http://schemas.openxmlformats.org/drawingml/2006/main"/>
-          <a:p xmlns:a="http://schemas.openxmlformats.org/drawingml/2006/main">
-            <a:r>
-              <a:rPr lang="en-US" sz="2250" b="1">
-                <a:solidFill>
-                  <a:srgbClr val="222222"/>
-                </a:solidFill>
-                <a:latin typeface="Tahoma"/>
-                <a:ea typeface="Tahoma"/>
-              </a:rPr>
-              <a:t>54%</a:t>
-            </a:r>
-            <a:endParaRPr lang="en-US"/>
-          </a:p>
-        </p:txBody>
-      </p:sp>
-      <p:sp>
-        <p:nvSpPr>
-          <p:cNvPr id="23" name="operating-label-1"/>
-          <p:cNvSpPr txBox="1"/>
-          <p:nvPr/>
-        </p:nvSpPr>
-        <p:spPr>
-          <a:xfrm xmlns:a="http://schemas.openxmlformats.org/drawingml/2006/main">
-            <a:off x="3790950" y="3333750"/>
-            <a:ext cx="1809750" cy="228600"/>
-          </a:xfrm>
-          <a:prstGeom xmlns:a="http://schemas.openxmlformats.org/drawingml/2006/main" prst="rect">
-            <a:avLst/>
-          </a:prstGeom>
-          <a:noFill xmlns:a="http://schemas.openxmlformats.org/drawingml/2006/main"/>
-          <a:ln xmlns:a="http://schemas.openxmlformats.org/drawingml/2006/main" w="0">
-            <a:noFill/>
-          </a:ln>
-        </p:spPr>
-        <p:txBody>
-          <a:bodyPr xmlns:a="http://schemas.openxmlformats.org/drawingml/2006/main" wrap="square" lIns="0" tIns="0" rIns="0" bIns="0" anchor="t"/>
-          <a:lstStyle xmlns:a="http://schemas.openxmlformats.org/drawingml/2006/main"/>
-          <a:p xmlns:a="http://schemas.openxmlformats.org/drawingml/2006/main">
-            <a:r>
-              <a:rPr lang="en-US" sz="1125" b="1">
-                <a:solidFill>
-                  <a:srgbClr val="8E8D88"/>
-                </a:solidFill>
-                <a:latin typeface="Tahoma"/>
-                <a:ea typeface="Tahoma"/>
-              </a:rPr>
-              <a:t>TARGET</a:t>
-            </a:r>
-            <a:endParaRPr lang="en-US"/>
-          </a:p>
-        </p:txBody>
-      </p:sp>
-      <p:sp>
-        <p:nvSpPr>
-          <p:cNvPr id="24" name="operating-bar-1"/>
-          <p:cNvSpPr/>
-          <p:nvPr/>
-        </p:nvSpPr>
-        <p:spPr>
-          <a:xfrm xmlns:a="http://schemas.openxmlformats.org/drawingml/2006/main">
-            <a:off x="3790950" y="3848100"/>
-            <a:ext cx="2095500" cy="323850"/>
-          </a:xfrm>
-          <a:prstGeom xmlns:a="http://schemas.openxmlformats.org/drawingml/2006/main" prst="rect">
-            <a:avLst/>
-          </a:prstGeom>
-          <a:solidFill xmlns:a="http://schemas.openxmlformats.org/drawingml/2006/main">
-            <a:srgbClr val="F3F5F8"/>
-          </a:solidFill>
+            <a:off x="4343400" y="6934200"/>
+            <a:ext cx="3181350" cy="0"/>
+          </a:xfrm>
+          <a:prstGeom xmlns:a="http://schemas.openxmlformats.org/drawingml/2006/main" prst="line">
+            <a:avLst/>
+          </a:prstGeom>
+          <a:noFill xmlns:a="http://schemas.openxmlformats.org/drawingml/2006/main"/>
           <a:ln xmlns:a="http://schemas.openxmlformats.org/drawingml/2006/main" w="12700">
             <a:solidFill>
               <a:srgbClr val="8E8D88"/>
@@ -4868,131 +4997,159 @@
       </p:sp>
       <p:sp>
         <p:nvSpPr>
-          <p:cNvPr id="25" name="operating-fill-1"/>
+          <p:cNvPr id="29" name="event-period-2"/>
+          <p:cNvSpPr txBox="1"/>
+          <p:nvPr/>
+        </p:nvSpPr>
+        <p:spPr>
+          <a:xfrm xmlns:a="http://schemas.openxmlformats.org/drawingml/2006/main">
+            <a:off x="7696200" y="3162300"/>
+            <a:ext cx="3181350" cy="323850"/>
+          </a:xfrm>
+          <a:prstGeom xmlns:a="http://schemas.openxmlformats.org/drawingml/2006/main" prst="rect">
+            <a:avLst/>
+          </a:prstGeom>
+          <a:noFill xmlns:a="http://schemas.openxmlformats.org/drawingml/2006/main"/>
+          <a:ln xmlns:a="http://schemas.openxmlformats.org/drawingml/2006/main" w="0">
+            <a:noFill/>
+          </a:ln>
+        </p:spPr>
+        <p:txBody>
+          <a:bodyPr xmlns:a="http://schemas.openxmlformats.org/drawingml/2006/main" wrap="square" lIns="0" tIns="0" rIns="0" bIns="0" anchor="t"/>
+          <a:lstStyle xmlns:a="http://schemas.openxmlformats.org/drawingml/2006/main"/>
+          <a:p xmlns:a="http://schemas.openxmlformats.org/drawingml/2006/main">
+            <a:r>
+              <a:rPr lang="en-US" sz="2100" b="1">
+                <a:solidFill>
+                  <a:srgbClr val="222222"/>
+                </a:solidFill>
+                <a:latin typeface="Tahoma"/>
+                <a:ea typeface="Tahoma"/>
+              </a:rPr>
+              <a:t>2023</a:t>
+            </a:r>
+            <a:endParaRPr lang="en-US"/>
+          </a:p>
+        </p:txBody>
+      </p:sp>
+      <p:sp>
+        <p:nvSpPr>
+          <p:cNvPr id="30" name="event-title-2"/>
+          <p:cNvSpPr txBox="1"/>
+          <p:nvPr/>
+        </p:nvSpPr>
+        <p:spPr>
+          <a:xfrm xmlns:a="http://schemas.openxmlformats.org/drawingml/2006/main">
+            <a:off x="7696200" y="3562350"/>
+            <a:ext cx="3181350" cy="247650"/>
+          </a:xfrm>
+          <a:prstGeom xmlns:a="http://schemas.openxmlformats.org/drawingml/2006/main" prst="rect">
+            <a:avLst/>
+          </a:prstGeom>
+          <a:noFill xmlns:a="http://schemas.openxmlformats.org/drawingml/2006/main"/>
+          <a:ln xmlns:a="http://schemas.openxmlformats.org/drawingml/2006/main" w="0">
+            <a:noFill/>
+          </a:ln>
+        </p:spPr>
+        <p:txBody>
+          <a:bodyPr xmlns:a="http://schemas.openxmlformats.org/drawingml/2006/main" wrap="square" lIns="0" tIns="0" rIns="0" bIns="0" anchor="t"/>
+          <a:lstStyle xmlns:a="http://schemas.openxmlformats.org/drawingml/2006/main"/>
+          <a:p xmlns:a="http://schemas.openxmlformats.org/drawingml/2006/main">
+            <a:r>
+              <a:rPr lang="en-US" sz="1275" b="1">
+                <a:solidFill>
+                  <a:srgbClr val="222222"/>
+                </a:solidFill>
+                <a:latin typeface="Tahoma"/>
+                <a:ea typeface="Tahoma"/>
+              </a:rPr>
+              <a:t>Scale</a:t>
+            </a:r>
+            <a:endParaRPr lang="en-US"/>
+          </a:p>
+        </p:txBody>
+      </p:sp>
+      <p:sp>
+        <p:nvSpPr>
+          <p:cNvPr id="31" name="event-text-2"/>
+          <p:cNvSpPr txBox="1"/>
+          <p:nvPr/>
+        </p:nvSpPr>
+        <p:spPr>
+          <a:xfrm xmlns:a="http://schemas.openxmlformats.org/drawingml/2006/main">
+            <a:off x="7696200" y="3905250"/>
+            <a:ext cx="3181350" cy="628650"/>
+          </a:xfrm>
+          <a:prstGeom xmlns:a="http://schemas.openxmlformats.org/drawingml/2006/main" prst="rect">
+            <a:avLst/>
+          </a:prstGeom>
+          <a:noFill xmlns:a="http://schemas.openxmlformats.org/drawingml/2006/main"/>
+          <a:ln xmlns:a="http://schemas.openxmlformats.org/drawingml/2006/main" w="0">
+            <a:noFill/>
+          </a:ln>
+        </p:spPr>
+        <p:txBody>
+          <a:bodyPr xmlns:a="http://schemas.openxmlformats.org/drawingml/2006/main" wrap="square" lIns="0" tIns="0" rIns="0" bIns="0" anchor="t"/>
+          <a:lstStyle xmlns:a="http://schemas.openxmlformats.org/drawingml/2006/main"/>
+          <a:p xmlns:a="http://schemas.openxmlformats.org/drawingml/2006/main">
+            <a:r>
+              <a:rPr lang="en-US" sz="1125">
+                <a:solidFill>
+                  <a:srgbClr val="8E8D88"/>
+                </a:solidFill>
+                <a:latin typeface="Tahoma"/>
+                <a:ea typeface="Tahoma"/>
+              </a:rPr>
+              <a:t>The network grows without losing the original constraint.</a:t>
+            </a:r>
+            <a:endParaRPr lang="en-US"/>
+          </a:p>
+        </p:txBody>
+      </p:sp>
+      <p:pic>
+        <p:nvPicPr>
+          <p:cNvPr id="32" name="event-photo-2">
+            <a:extLst xmlns:a="http://schemas.openxmlformats.org/drawingml/2006/main">
+              <a:ext uri="{C183D7F6-B498-43B3-948B-1728B52AA6E4}">
+                <adec:decorative xmlns:adec="http://schemas.microsoft.com/office/drawing/2017/decorative" val="1"/>
+              </a:ext>
+            </a:extLst>
+          </p:cNvPr>
+          <p:cNvPicPr/>
+          <p:nvPr/>
+        </p:nvPicPr>
+        <p:blipFill>
+          <a:blip xmlns:r="http://schemas.openxmlformats.org/officeDocument/2006/relationships" xmlns:a="http://schemas.openxmlformats.org/drawingml/2006/main" r:embed="rIdOfficeKitImagebdd32fb5cfa65986_1"/>
+          <a:srcRect xmlns:a="http://schemas.openxmlformats.org/drawingml/2006/main" l="0" t="34001" r="0" b="34001"/>
+          <a:stretch xmlns:a="http://schemas.openxmlformats.org/drawingml/2006/main">
+            <a:fillRect/>
+          </a:stretch>
+        </p:blipFill>
+        <p:spPr>
+          <a:xfrm xmlns:a="http://schemas.openxmlformats.org/drawingml/2006/main">
+            <a:off x="7696200" y="4914900"/>
+            <a:ext cx="3181350" cy="1809750"/>
+          </a:xfrm>
+          <a:prstGeom xmlns:a="http://schemas.openxmlformats.org/drawingml/2006/main" prst="rect">
+            <a:avLst/>
+          </a:prstGeom>
+        </p:spPr>
+      </p:pic>
+      <p:sp>
+        <p:nvSpPr>
+          <p:cNvPr id="33" name="event-rule-2"/>
           <p:cNvSpPr/>
           <p:nvPr/>
         </p:nvSpPr>
         <p:spPr>
           <a:xfrm xmlns:a="http://schemas.openxmlformats.org/drawingml/2006/main">
-            <a:off x="3790950" y="3848100"/>
-            <a:ext cx="1590675" cy="323850"/>
-          </a:xfrm>
-          <a:prstGeom xmlns:a="http://schemas.openxmlformats.org/drawingml/2006/main" prst="rect">
-            <a:avLst/>
-          </a:prstGeom>
-          <a:solidFill xmlns:a="http://schemas.openxmlformats.org/drawingml/2006/main">
-            <a:srgbClr val="6B7E65"/>
-          </a:solidFill>
-          <a:ln xmlns:a="http://schemas.openxmlformats.org/drawingml/2006/main" w="0">
-            <a:solidFill>
-              <a:srgbClr val="6B7E65"/>
-            </a:solidFill>
-            <a:prstDash val="solid"/>
-          </a:ln>
-        </p:spPr>
-        <p:txBody>
-          <a:bodyPr xmlns:a="http://schemas.openxmlformats.org/drawingml/2006/main" wrap="square" lIns="0" tIns="0" rIns="0" bIns="0" anchor="t"/>
-          <a:lstStyle xmlns:a="http://schemas.openxmlformats.org/drawingml/2006/main"/>
-          <a:p xmlns:a="http://schemas.openxmlformats.org/drawingml/2006/main">
-            <a:r>
-              <a:rPr lang="en-US"/>
-              <a:t/>
-            </a:r>
-            <a:endParaRPr lang="en-US"/>
-          </a:p>
-        </p:txBody>
-      </p:sp>
-      <p:sp>
-        <p:nvSpPr>
-          <p:cNvPr id="26" name="operating-value-1"/>
-          <p:cNvSpPr txBox="1"/>
-          <p:nvPr/>
-        </p:nvSpPr>
-        <p:spPr>
-          <a:xfrm xmlns:a="http://schemas.openxmlformats.org/drawingml/2006/main">
-            <a:off x="3790950" y="4400550"/>
-            <a:ext cx="2095500" cy="419100"/>
-          </a:xfrm>
-          <a:prstGeom xmlns:a="http://schemas.openxmlformats.org/drawingml/2006/main" prst="rect">
-            <a:avLst/>
-          </a:prstGeom>
-          <a:noFill xmlns:a="http://schemas.openxmlformats.org/drawingml/2006/main"/>
-          <a:ln xmlns:a="http://schemas.openxmlformats.org/drawingml/2006/main" w="0">
-            <a:noFill/>
-          </a:ln>
-        </p:spPr>
-        <p:txBody>
-          <a:bodyPr xmlns:a="http://schemas.openxmlformats.org/drawingml/2006/main" wrap="square" lIns="0" tIns="0" rIns="0" bIns="0" anchor="t"/>
-          <a:lstStyle xmlns:a="http://schemas.openxmlformats.org/drawingml/2006/main"/>
-          <a:p xmlns:a="http://schemas.openxmlformats.org/drawingml/2006/main">
-            <a:r>
-              <a:rPr lang="en-US" sz="2250" b="1">
-                <a:solidFill>
-                  <a:srgbClr val="222222"/>
-                </a:solidFill>
-                <a:latin typeface="Tahoma"/>
-                <a:ea typeface="Tahoma"/>
-              </a:rPr>
-              <a:t>76%</a:t>
-            </a:r>
-            <a:endParaRPr lang="en-US"/>
-          </a:p>
-        </p:txBody>
-      </p:sp>
-      <p:sp>
-        <p:nvSpPr>
-          <p:cNvPr id="27" name="operating-label-2"/>
-          <p:cNvSpPr txBox="1"/>
-          <p:nvPr/>
-        </p:nvSpPr>
-        <p:spPr>
-          <a:xfrm xmlns:a="http://schemas.openxmlformats.org/drawingml/2006/main">
-            <a:off x="6477000" y="3333750"/>
-            <a:ext cx="1809750" cy="228600"/>
-          </a:xfrm>
-          <a:prstGeom xmlns:a="http://schemas.openxmlformats.org/drawingml/2006/main" prst="rect">
-            <a:avLst/>
-          </a:prstGeom>
-          <a:noFill xmlns:a="http://schemas.openxmlformats.org/drawingml/2006/main"/>
-          <a:ln xmlns:a="http://schemas.openxmlformats.org/drawingml/2006/main" w="0">
-            <a:noFill/>
-          </a:ln>
-        </p:spPr>
-        <p:txBody>
-          <a:bodyPr xmlns:a="http://schemas.openxmlformats.org/drawingml/2006/main" wrap="square" lIns="0" tIns="0" rIns="0" bIns="0" anchor="t"/>
-          <a:lstStyle xmlns:a="http://schemas.openxmlformats.org/drawingml/2006/main"/>
-          <a:p xmlns:a="http://schemas.openxmlformats.org/drawingml/2006/main">
-            <a:r>
-              <a:rPr lang="en-US" sz="1125" b="1">
-                <a:solidFill>
-                  <a:srgbClr val="8E8D88"/>
-                </a:solidFill>
-                <a:latin typeface="Tahoma"/>
-                <a:ea typeface="Tahoma"/>
-              </a:rPr>
-              <a:t>GAP</a:t>
-            </a:r>
-            <a:endParaRPr lang="en-US"/>
-          </a:p>
-        </p:txBody>
-      </p:sp>
-      <p:sp>
-        <p:nvSpPr>
-          <p:cNvPr id="28" name="operating-bar-2"/>
-          <p:cNvSpPr/>
-          <p:nvPr/>
-        </p:nvSpPr>
-        <p:spPr>
-          <a:xfrm xmlns:a="http://schemas.openxmlformats.org/drawingml/2006/main">
-            <a:off x="6477000" y="3848100"/>
-            <a:ext cx="2095500" cy="323850"/>
-          </a:xfrm>
-          <a:prstGeom xmlns:a="http://schemas.openxmlformats.org/drawingml/2006/main" prst="rect">
-            <a:avLst/>
-          </a:prstGeom>
-          <a:solidFill xmlns:a="http://schemas.openxmlformats.org/drawingml/2006/main">
-            <a:srgbClr val="F3F5F8"/>
-          </a:solidFill>
+            <a:off x="7696200" y="6934200"/>
+            <a:ext cx="3181350" cy="0"/>
+          </a:xfrm>
+          <a:prstGeom xmlns:a="http://schemas.openxmlformats.org/drawingml/2006/main" prst="line">
+            <a:avLst/>
+          </a:prstGeom>
+          <a:noFill xmlns:a="http://schemas.openxmlformats.org/drawingml/2006/main"/>
           <a:ln xmlns:a="http://schemas.openxmlformats.org/drawingml/2006/main" w="12700">
             <a:solidFill>
               <a:srgbClr val="8E8D88"/>
@@ -5014,24 +5171,162 @@
       </p:sp>
       <p:sp>
         <p:nvSpPr>
-          <p:cNvPr id="29" name="operating-fill-2"/>
+          <p:cNvPr id="34" name="event-period-3"/>
+          <p:cNvSpPr txBox="1"/>
+          <p:nvPr/>
+        </p:nvSpPr>
+        <p:spPr>
+          <a:xfrm xmlns:a="http://schemas.openxmlformats.org/drawingml/2006/main">
+            <a:off x="11049000" y="3162300"/>
+            <a:ext cx="3181350" cy="323850"/>
+          </a:xfrm>
+          <a:prstGeom xmlns:a="http://schemas.openxmlformats.org/drawingml/2006/main" prst="rect">
+            <a:avLst/>
+          </a:prstGeom>
+          <a:noFill xmlns:a="http://schemas.openxmlformats.org/drawingml/2006/main"/>
+          <a:ln xmlns:a="http://schemas.openxmlformats.org/drawingml/2006/main" w="0">
+            <a:noFill/>
+          </a:ln>
+        </p:spPr>
+        <p:txBody>
+          <a:bodyPr xmlns:a="http://schemas.openxmlformats.org/drawingml/2006/main" wrap="square" lIns="0" tIns="0" rIns="0" bIns="0" anchor="t"/>
+          <a:lstStyle xmlns:a="http://schemas.openxmlformats.org/drawingml/2006/main"/>
+          <a:p xmlns:a="http://schemas.openxmlformats.org/drawingml/2006/main">
+            <a:r>
+              <a:rPr lang="en-US" sz="2100" b="1">
+                <a:solidFill>
+                  <a:srgbClr val="B7A530"/>
+                </a:solidFill>
+                <a:latin typeface="Tahoma"/>
+                <a:ea typeface="Tahoma"/>
+              </a:rPr>
+              <a:t>2025</a:t>
+            </a:r>
+            <a:endParaRPr lang="en-US"/>
+          </a:p>
+        </p:txBody>
+      </p:sp>
+      <p:sp>
+        <p:nvSpPr>
+          <p:cNvPr id="35" name="event-title-3"/>
+          <p:cNvSpPr txBox="1"/>
+          <p:nvPr/>
+        </p:nvSpPr>
+        <p:spPr>
+          <a:xfrm xmlns:a="http://schemas.openxmlformats.org/drawingml/2006/main">
+            <a:off x="11049000" y="3562350"/>
+            <a:ext cx="3181350" cy="247650"/>
+          </a:xfrm>
+          <a:prstGeom xmlns:a="http://schemas.openxmlformats.org/drawingml/2006/main" prst="rect">
+            <a:avLst/>
+          </a:prstGeom>
+          <a:noFill xmlns:a="http://schemas.openxmlformats.org/drawingml/2006/main"/>
+          <a:ln xmlns:a="http://schemas.openxmlformats.org/drawingml/2006/main" w="0">
+            <a:noFill/>
+          </a:ln>
+        </p:spPr>
+        <p:txBody>
+          <a:bodyPr xmlns:a="http://schemas.openxmlformats.org/drawingml/2006/main" wrap="square" lIns="0" tIns="0" rIns="0" bIns="0" anchor="t"/>
+          <a:lstStyle xmlns:a="http://schemas.openxmlformats.org/drawingml/2006/main"/>
+          <a:p xmlns:a="http://schemas.openxmlformats.org/drawingml/2006/main">
+            <a:r>
+              <a:rPr lang="en-US" sz="1275" b="1">
+                <a:solidFill>
+                  <a:srgbClr val="222222"/>
+                </a:solidFill>
+                <a:latin typeface="Tahoma"/>
+                <a:ea typeface="Tahoma"/>
+              </a:rPr>
+              <a:t>Next chapter</a:t>
+            </a:r>
+            <a:endParaRPr lang="en-US"/>
+          </a:p>
+        </p:txBody>
+      </p:sp>
+      <p:sp>
+        <p:nvSpPr>
+          <p:cNvPr id="36" name="event-text-3"/>
+          <p:cNvSpPr txBox="1"/>
+          <p:nvPr/>
+        </p:nvSpPr>
+        <p:spPr>
+          <a:xfrm xmlns:a="http://schemas.openxmlformats.org/drawingml/2006/main">
+            <a:off x="11049000" y="3905250"/>
+            <a:ext cx="3181350" cy="628650"/>
+          </a:xfrm>
+          <a:prstGeom xmlns:a="http://schemas.openxmlformats.org/drawingml/2006/main" prst="rect">
+            <a:avLst/>
+          </a:prstGeom>
+          <a:noFill xmlns:a="http://schemas.openxmlformats.org/drawingml/2006/main"/>
+          <a:ln xmlns:a="http://schemas.openxmlformats.org/drawingml/2006/main" w="0">
+            <a:noFill/>
+          </a:ln>
+        </p:spPr>
+        <p:txBody>
+          <a:bodyPr xmlns:a="http://schemas.openxmlformats.org/drawingml/2006/main" wrap="square" lIns="0" tIns="0" rIns="0" bIns="0" anchor="t"/>
+          <a:lstStyle xmlns:a="http://schemas.openxmlformats.org/drawingml/2006/main"/>
+          <a:p xmlns:a="http://schemas.openxmlformats.org/drawingml/2006/main">
+            <a:r>
+              <a:rPr lang="en-US" sz="1125">
+                <a:solidFill>
+                  <a:srgbClr val="8E8D88"/>
+                </a:solidFill>
+                <a:latin typeface="Tahoma"/>
+                <a:ea typeface="Tahoma"/>
+              </a:rPr>
+              <a:t>The next period turns evidence into one bounded move.</a:t>
+            </a:r>
+            <a:endParaRPr lang="en-US"/>
+          </a:p>
+        </p:txBody>
+      </p:sp>
+      <p:pic>
+        <p:nvPicPr>
+          <p:cNvPr id="37" name="event-photo-3">
+            <a:extLst xmlns:a="http://schemas.openxmlformats.org/drawingml/2006/main">
+              <a:ext uri="{C183D7F6-B498-43B3-948B-1728B52AA6E4}">
+                <adec:decorative xmlns:adec="http://schemas.microsoft.com/office/drawing/2017/decorative" val="1"/>
+              </a:ext>
+            </a:extLst>
+          </p:cNvPr>
+          <p:cNvPicPr/>
+          <p:nvPr/>
+        </p:nvPicPr>
+        <p:blipFill>
+          <a:blip xmlns:r="http://schemas.openxmlformats.org/officeDocument/2006/relationships" xmlns:a="http://schemas.openxmlformats.org/drawingml/2006/main" r:embed="rIdOfficeKitImage092dd3ee80187530_1"/>
+          <a:srcRect xmlns:a="http://schemas.openxmlformats.org/drawingml/2006/main" l="0" t="34001" r="0" b="34001"/>
+          <a:stretch xmlns:a="http://schemas.openxmlformats.org/drawingml/2006/main">
+            <a:fillRect/>
+          </a:stretch>
+        </p:blipFill>
+        <p:spPr>
+          <a:xfrm xmlns:a="http://schemas.openxmlformats.org/drawingml/2006/main">
+            <a:off x="11049000" y="4914900"/>
+            <a:ext cx="3181350" cy="1809750"/>
+          </a:xfrm>
+          <a:prstGeom xmlns:a="http://schemas.openxmlformats.org/drawingml/2006/main" prst="rect">
+            <a:avLst/>
+          </a:prstGeom>
+        </p:spPr>
+      </p:pic>
+      <p:sp>
+        <p:nvSpPr>
+          <p:cNvPr id="38" name="event-rule-3"/>
           <p:cNvSpPr/>
           <p:nvPr/>
         </p:nvSpPr>
         <p:spPr>
           <a:xfrm xmlns:a="http://schemas.openxmlformats.org/drawingml/2006/main">
-            <a:off x="6477000" y="3848100"/>
-            <a:ext cx="457200" cy="323850"/>
-          </a:xfrm>
-          <a:prstGeom xmlns:a="http://schemas.openxmlformats.org/drawingml/2006/main" prst="rect">
-            <a:avLst/>
-          </a:prstGeom>
-          <a:solidFill xmlns:a="http://schemas.openxmlformats.org/drawingml/2006/main">
-            <a:srgbClr val="222222"/>
-          </a:solidFill>
-          <a:ln xmlns:a="http://schemas.openxmlformats.org/drawingml/2006/main" w="0">
+            <a:off x="11049000" y="6934200"/>
+            <a:ext cx="3181350" cy="0"/>
+          </a:xfrm>
+          <a:prstGeom xmlns:a="http://schemas.openxmlformats.org/drawingml/2006/main" prst="line">
+            <a:avLst/>
+          </a:prstGeom>
+          <a:noFill xmlns:a="http://schemas.openxmlformats.org/drawingml/2006/main"/>
+          <a:ln xmlns:a="http://schemas.openxmlformats.org/drawingml/2006/main" w="25400">
             <a:solidFill>
-              <a:srgbClr val="222222"/>
+              <a:srgbClr val="B7A530"/>
             </a:solidFill>
             <a:prstDash val="solid"/>
           </a:ln>
@@ -5050,226 +5345,44 @@
       </p:sp>
       <p:sp>
         <p:nvSpPr>
-          <p:cNvPr id="30" name="operating-value-2"/>
-          <p:cNvSpPr txBox="1"/>
-          <p:nvPr/>
-        </p:nvSpPr>
-        <p:spPr>
-          <a:xfrm xmlns:a="http://schemas.openxmlformats.org/drawingml/2006/main">
-            <a:off x="6477000" y="4400550"/>
-            <a:ext cx="2095500" cy="419100"/>
-          </a:xfrm>
-          <a:prstGeom xmlns:a="http://schemas.openxmlformats.org/drawingml/2006/main" prst="rect">
-            <a:avLst/>
-          </a:prstGeom>
-          <a:noFill xmlns:a="http://schemas.openxmlformats.org/drawingml/2006/main"/>
-          <a:ln xmlns:a="http://schemas.openxmlformats.org/drawingml/2006/main" w="0">
-            <a:noFill/>
-          </a:ln>
-        </p:spPr>
-        <p:txBody>
-          <a:bodyPr xmlns:a="http://schemas.openxmlformats.org/drawingml/2006/main" wrap="square" lIns="0" tIns="0" rIns="0" bIns="0" anchor="t"/>
-          <a:lstStyle xmlns:a="http://schemas.openxmlformats.org/drawingml/2006/main"/>
-          <a:p xmlns:a="http://schemas.openxmlformats.org/drawingml/2006/main">
-            <a:r>
-              <a:rPr lang="en-US" sz="2250" b="1">
-                <a:solidFill>
-                  <a:srgbClr val="222222"/>
-                </a:solidFill>
-                <a:latin typeface="Tahoma"/>
-                <a:ea typeface="Tahoma"/>
-              </a:rPr>
-              <a:t>22%</a:t>
-            </a:r>
-            <a:endParaRPr lang="en-US"/>
-          </a:p>
-        </p:txBody>
-      </p:sp>
-      <p:sp>
-        <p:nvSpPr>
-          <p:cNvPr id="31" name="operating-axis"/>
-          <p:cNvSpPr/>
-          <p:nvPr/>
-        </p:nvSpPr>
-        <p:spPr>
-          <a:xfrm xmlns:a="http://schemas.openxmlformats.org/drawingml/2006/main">
-            <a:off x="1104900" y="5334000"/>
-            <a:ext cx="7486650" cy="0"/>
-          </a:xfrm>
-          <a:prstGeom xmlns:a="http://schemas.openxmlformats.org/drawingml/2006/main" prst="line">
-            <a:avLst/>
-          </a:prstGeom>
-          <a:noFill xmlns:a="http://schemas.openxmlformats.org/drawingml/2006/main"/>
-          <a:ln xmlns:a="http://schemas.openxmlformats.org/drawingml/2006/main" w="25400">
-            <a:solidFill>
-              <a:srgbClr val="8E8D88"/>
-            </a:solidFill>
-            <a:prstDash val="solid"/>
-          </a:ln>
-        </p:spPr>
-        <p:txBody>
-          <a:bodyPr xmlns:a="http://schemas.openxmlformats.org/drawingml/2006/main" wrap="square" lIns="0" tIns="0" rIns="0" bIns="0" anchor="t"/>
-          <a:lstStyle xmlns:a="http://schemas.openxmlformats.org/drawingml/2006/main"/>
-          <a:p xmlns:a="http://schemas.openxmlformats.org/drawingml/2006/main">
-            <a:r>
-              <a:rPr lang="en-US"/>
-              <a:t/>
-            </a:r>
-            <a:endParaRPr lang="en-US"/>
-          </a:p>
-        </p:txBody>
-      </p:sp>
-      <p:sp>
-        <p:nvSpPr>
-          <p:cNvPr id="32" name="operating-read"/>
-          <p:cNvSpPr txBox="1"/>
-          <p:nvPr/>
-        </p:nvSpPr>
-        <p:spPr>
-          <a:xfrm xmlns:a="http://schemas.openxmlformats.org/drawingml/2006/main">
-            <a:off x="1104900" y="5657850"/>
-            <a:ext cx="7524750" cy="342900"/>
-          </a:xfrm>
-          <a:prstGeom xmlns:a="http://schemas.openxmlformats.org/drawingml/2006/main" prst="rect">
-            <a:avLst/>
-          </a:prstGeom>
-          <a:noFill xmlns:a="http://schemas.openxmlformats.org/drawingml/2006/main"/>
-          <a:ln xmlns:a="http://schemas.openxmlformats.org/drawingml/2006/main" w="0">
-            <a:noFill/>
-          </a:ln>
-        </p:spPr>
-        <p:txBody>
-          <a:bodyPr xmlns:a="http://schemas.openxmlformats.org/drawingml/2006/main" wrap="square" lIns="0" tIns="0" rIns="0" bIns="0" anchor="t"/>
-          <a:lstStyle xmlns:a="http://schemas.openxmlformats.org/drawingml/2006/main"/>
-          <a:p xmlns:a="http://schemas.openxmlformats.org/drawingml/2006/main">
-            <a:r>
-              <a:rPr lang="en-US" sz="1800" b="1">
-                <a:solidFill>
-                  <a:srgbClr val="222222"/>
-                </a:solidFill>
-                <a:latin typeface="Tahoma"/>
-                <a:ea typeface="Tahoma"/>
-              </a:rPr>
-              <a:t>Status is useful only when the next handoff is visible.</a:t>
-            </a:r>
-            <a:endParaRPr lang="en-US"/>
-          </a:p>
-        </p:txBody>
-      </p:sp>
-      <p:sp>
-        <p:nvSpPr>
-          <p:cNvPr id="33" name="operating-note-label"/>
-          <p:cNvSpPr txBox="1"/>
-          <p:nvPr/>
-        </p:nvSpPr>
-        <p:spPr>
-          <a:xfrm xmlns:a="http://schemas.openxmlformats.org/drawingml/2006/main">
-            <a:off x="10287000" y="3333750"/>
-            <a:ext cx="2857500" cy="228600"/>
-          </a:xfrm>
-          <a:prstGeom xmlns:a="http://schemas.openxmlformats.org/drawingml/2006/main" prst="rect">
-            <a:avLst/>
-          </a:prstGeom>
-          <a:noFill xmlns:a="http://schemas.openxmlformats.org/drawingml/2006/main"/>
-          <a:ln xmlns:a="http://schemas.openxmlformats.org/drawingml/2006/main" w="0">
-            <a:noFill/>
-          </a:ln>
-        </p:spPr>
-        <p:txBody>
-          <a:bodyPr xmlns:a="http://schemas.openxmlformats.org/drawingml/2006/main" wrap="square" lIns="0" tIns="0" rIns="0" bIns="0" anchor="t"/>
-          <a:lstStyle xmlns:a="http://schemas.openxmlformats.org/drawingml/2006/main"/>
-          <a:p xmlns:a="http://schemas.openxmlformats.org/drawingml/2006/main">
-            <a:r>
-              <a:rPr lang="en-US" sz="1125" b="1">
-                <a:solidFill>
-                  <a:srgbClr val="B7A530"/>
-                </a:solidFill>
-                <a:latin typeface="Tahoma"/>
-                <a:ea typeface="Tahoma"/>
-              </a:rPr>
-              <a:t>EXCEPTION</a:t>
-            </a:r>
-            <a:endParaRPr lang="en-US"/>
-          </a:p>
-        </p:txBody>
-      </p:sp>
-      <p:sp>
-        <p:nvSpPr>
-          <p:cNvPr id="34" name="operating-note"/>
-          <p:cNvSpPr txBox="1"/>
-          <p:nvPr/>
-        </p:nvSpPr>
-        <p:spPr>
-          <a:xfrm xmlns:a="http://schemas.openxmlformats.org/drawingml/2006/main">
-            <a:off x="10287000" y="3829050"/>
-            <a:ext cx="3143250" cy="723900"/>
-          </a:xfrm>
-          <a:prstGeom xmlns:a="http://schemas.openxmlformats.org/drawingml/2006/main" prst="rect">
-            <a:avLst/>
-          </a:prstGeom>
-          <a:noFill xmlns:a="http://schemas.openxmlformats.org/drawingml/2006/main"/>
-          <a:ln xmlns:a="http://schemas.openxmlformats.org/drawingml/2006/main" w="0">
-            <a:noFill/>
-          </a:ln>
-        </p:spPr>
-        <p:txBody>
-          <a:bodyPr xmlns:a="http://schemas.openxmlformats.org/drawingml/2006/main" wrap="square" lIns="0" tIns="0" rIns="0" bIns="0" anchor="t"/>
-          <a:lstStyle xmlns:a="http://schemas.openxmlformats.org/drawingml/2006/main"/>
-          <a:p xmlns:a="http://schemas.openxmlformats.org/drawingml/2006/main">
-            <a:r>
-              <a:rPr lang="en-US" sz="2100" b="1">
-                <a:solidFill>
-                  <a:srgbClr val="222222"/>
-                </a:solidFill>
-                <a:latin typeface="Tahoma"/>
-                <a:ea typeface="Tahoma"/>
-              </a:rPr>
-              <a:t>The gap is not a decoration; it is the work.</a:t>
-            </a:r>
-            <a:endParaRPr lang="en-US"/>
-          </a:p>
-        </p:txBody>
-      </p:sp>
-      <p:sp>
-        <p:nvSpPr>
-          <p:cNvPr id="35" name="operating-note-foot"/>
-          <p:cNvSpPr txBox="1"/>
-          <p:nvPr/>
-        </p:nvSpPr>
-        <p:spPr>
-          <a:xfrm xmlns:a="http://schemas.openxmlformats.org/drawingml/2006/main">
-            <a:off x="10287000" y="5010150"/>
-            <a:ext cx="3143250" cy="457200"/>
-          </a:xfrm>
-          <a:prstGeom xmlns:a="http://schemas.openxmlformats.org/drawingml/2006/main" prst="rect">
-            <a:avLst/>
-          </a:prstGeom>
-          <a:noFill xmlns:a="http://schemas.openxmlformats.org/drawingml/2006/main"/>
-          <a:ln xmlns:a="http://schemas.openxmlformats.org/drawingml/2006/main" w="0">
-            <a:noFill/>
-          </a:ln>
-        </p:spPr>
-        <p:txBody>
-          <a:bodyPr xmlns:a="http://schemas.openxmlformats.org/drawingml/2006/main" wrap="square" lIns="0" tIns="0" rIns="0" bIns="0" anchor="t"/>
-          <a:lstStyle xmlns:a="http://schemas.openxmlformats.org/drawingml/2006/main"/>
-          <a:p xmlns:a="http://schemas.openxmlformats.org/drawingml/2006/main">
-            <a:r>
-              <a:rPr lang="en-US" sz="1275">
+          <p:cNvPr id="39" name="event-footnote"/>
+          <p:cNvSpPr txBox="1"/>
+          <p:nvPr/>
+        </p:nvSpPr>
+        <p:spPr>
+          <a:xfrm xmlns:a="http://schemas.openxmlformats.org/drawingml/2006/main">
+            <a:off x="990600" y="7239000"/>
+            <a:ext cx="10668000" cy="228600"/>
+          </a:xfrm>
+          <a:prstGeom xmlns:a="http://schemas.openxmlformats.org/drawingml/2006/main" prst="rect">
+            <a:avLst/>
+          </a:prstGeom>
+          <a:noFill xmlns:a="http://schemas.openxmlformats.org/drawingml/2006/main"/>
+          <a:ln xmlns:a="http://schemas.openxmlformats.org/drawingml/2006/main" w="0">
+            <a:noFill/>
+          </a:ln>
+        </p:spPr>
+        <p:txBody>
+          <a:bodyPr xmlns:a="http://schemas.openxmlformats.org/drawingml/2006/main" wrap="square" lIns="0" tIns="0" rIns="0" bIns="0" anchor="t"/>
+          <a:lstStyle xmlns:a="http://schemas.openxmlformats.org/drawingml/2006/main"/>
+          <a:p xmlns:a="http://schemas.openxmlformats.org/drawingml/2006/main">
+            <a:r>
+              <a:rPr lang="en-US" sz="1050">
                 <a:solidFill>
                   <a:srgbClr val="8E8D88"/>
                 </a:solidFill>
                 <a:latin typeface="Tahoma"/>
                 <a:ea typeface="Tahoma"/>
               </a:rPr>
-              <a:t>A healthy page names the owner and the next date.</a:t>
-            </a:r>
-            <a:endParaRPr lang="en-US"/>
-          </a:p>
-        </p:txBody>
-      </p:sp>
-      <p:sp>
-        <p:nvSpPr>
-          <p:cNvPr id="36" name="source"/>
+              <a:t>Event sequence · one image per milestone · source and period remain adjacent</a:t>
+            </a:r>
+            <a:endParaRPr lang="en-US"/>
+          </a:p>
+        </p:txBody>
+      </p:sp>
+      <p:sp>
+        <p:nvSpPr>
+          <p:cNvPr id="40" name="source"/>
           <p:cNvSpPr txBox="1"/>
           <p:nvPr/>
         </p:nvSpPr>
@@ -5306,7 +5419,7 @@
       </p:sp>
       <p:sp>
         <p:nvSpPr>
-          <p:cNvPr id="37" name="page-number"/>
+          <p:cNvPr id="41" name="page-number"/>
           <p:cNvSpPr txBox="1"/>
           <p:nvPr/>
         </p:nvSpPr>
@@ -5356,7 +5469,7 @@
     <p:bg>
       <p:bgPr>
         <a:blipFill xmlns:a="http://schemas.openxmlformats.org/drawingml/2006/main">
-          <a:blip xmlns:r="http://schemas.openxmlformats.org/officeDocument/2006/relationships" r:embed="rIdOfficeKitImage026be3a43029630d_1"/>
+          <a:blip xmlns:r="http://schemas.openxmlformats.org/officeDocument/2006/relationships" r:embed="rIdOfficeKitImage2930549abca3ae00_1"/>
           <a:stretch>
             <a:fillRect/>
           </a:stretch>

--- a/skills/presentation-template-library/skills/artifact-template-jade-annual-brief/assets/reference.pptx
+++ b/skills/presentation-template-library/skills/artifact-template-jade-annual-brief/assets/reference.pptx
@@ -5469,7 +5469,7 @@
     <p:bg>
       <p:bgPr>
         <a:blipFill xmlns:a="http://schemas.openxmlformats.org/drawingml/2006/main">
-          <a:blip xmlns:r="http://schemas.openxmlformats.org/officeDocument/2006/relationships" r:embed="rIdOfficeKitImage2930549abca3ae00_1"/>
+          <a:blip xmlns:r="http://schemas.openxmlformats.org/officeDocument/2006/relationships" r:embed="rIdOfficeKitImaged3ade97fd9ca0fdd_1"/>
           <a:stretch>
             <a:fillRect/>
           </a:stretch>

--- a/skills/presentation-template-library/skills/artifact-template-jade-annual-brief/assets/reference.pptx
+++ b/skills/presentation-template-library/skills/artifact-template-jade-annual-brief/assets/reference.pptx
@@ -200,7 +200,7 @@
     <p:bg>
       <p:bgPr>
         <a:blipFill xmlns:a="http://schemas.openxmlformats.org/drawingml/2006/main">
-          <a:blip xmlns:r="http://schemas.openxmlformats.org/officeDocument/2006/relationships" r:embed="rIdOfficeKitImage2930549abca3ae00_1"/>
+          <a:blip xmlns:r="http://schemas.openxmlformats.org/officeDocument/2006/relationships" r:embed="rIdOfficeKitImage7acdacea277813e8_1"/>
           <a:stretch>
             <a:fillRect/>
           </a:stretch>
@@ -3232,492 +3232,16 @@
           </a:p>
         </p:txBody>
       </p:sp>
-      <p:graphicFrame>
-        <p:nvGraphicFramePr>
-          <p:cNvPr id="19" name="work-evidence-table"/>
-          <p:cNvGraphicFramePr>
-            <a:graphicFrameLocks xmlns:a="http://schemas.openxmlformats.org/drawingml/2006/main" noGrp="1"/>
-          </p:cNvGraphicFramePr>
-          <p:nvPr/>
-        </p:nvGraphicFramePr>
-        <p:xfrm>
-          <a:off xmlns:a="http://schemas.openxmlformats.org/drawingml/2006/main" x="990600" y="3162300"/>
-          <a:ext xmlns:a="http://schemas.openxmlformats.org/drawingml/2006/main" cx="8001000" cy="2895600"/>
-        </p:xfrm>
-        <a:graphic xmlns:a="http://schemas.openxmlformats.org/drawingml/2006/main">
-          <a:graphicData uri="http://schemas.openxmlformats.org/drawingml/2006/table">
-            <a:tbl>
-              <a:tblPr firstRow="1"/>
-              <a:tblGrid>
-                <a:gridCol w="2000250"/>
-                <a:gridCol w="2000250"/>
-                <a:gridCol w="2000250"/>
-                <a:gridCol w="2000250"/>
-              </a:tblGrid>
-              <a:tr h="579120">
-                <a:tc>
-                  <a:txBody>
-                    <a:bodyPr/>
-                    <a:lstStyle/>
-                    <a:p>
-                      <a:r>
-                        <a:rPr lang="en-US" sz="1350" b="1">
-                          <a:solidFill>
-                            <a:srgbClr val="000000"/>
-                          </a:solidFill>
-                        </a:rPr>
-                        <a:t>Method</a:t>
-                      </a:r>
-                      <a:endParaRPr lang="en-US" sz="1350"/>
-                    </a:p>
-                  </a:txBody>
-                  <a:tcPr>
-                    <a:solidFill>
-                      <a:srgbClr val="EDEDED"/>
-                    </a:solidFill>
-                  </a:tcPr>
-                </a:tc>
-                <a:tc>
-                  <a:txBody>
-                    <a:bodyPr/>
-                    <a:lstStyle/>
-                    <a:p>
-                      <a:r>
-                        <a:rPr lang="en-US" sz="1350" b="1">
-                          <a:solidFill>
-                            <a:srgbClr val="000000"/>
-                          </a:solidFill>
-                        </a:rPr>
-                        <a:t>Control</a:t>
-                      </a:r>
-                      <a:endParaRPr lang="en-US" sz="1350"/>
-                    </a:p>
-                  </a:txBody>
-                  <a:tcPr>
-                    <a:solidFill>
-                      <a:srgbClr val="EDEDED"/>
-                    </a:solidFill>
-                  </a:tcPr>
-                </a:tc>
-                <a:tc>
-                  <a:txBody>
-                    <a:bodyPr/>
-                    <a:lstStyle/>
-                    <a:p>
-                      <a:r>
-                        <a:rPr lang="en-US" sz="1350" b="1">
-                          <a:solidFill>
-                            <a:srgbClr val="000000"/>
-                          </a:solidFill>
-                        </a:rPr>
-                        <a:t>Pilot</a:t>
-                      </a:r>
-                      <a:endParaRPr lang="en-US" sz="1350"/>
-                    </a:p>
-                  </a:txBody>
-                  <a:tcPr>
-                    <a:solidFill>
-                      <a:srgbClr val="EDEDED"/>
-                    </a:solidFill>
-                  </a:tcPr>
-                </a:tc>
-                <a:tc>
-                  <a:txBody>
-                    <a:bodyPr/>
-                    <a:lstStyle/>
-                    <a:p>
-                      <a:r>
-                        <a:rPr lang="en-US" sz="1350" b="1">
-                          <a:solidFill>
-                            <a:srgbClr val="000000"/>
-                          </a:solidFill>
-                        </a:rPr>
-                        <a:t>Read-through</a:t>
-                      </a:r>
-                      <a:endParaRPr lang="en-US" sz="1350"/>
-                    </a:p>
-                  </a:txBody>
-                  <a:tcPr>
-                    <a:solidFill>
-                      <a:srgbClr val="EDEDED"/>
-                    </a:solidFill>
-                  </a:tcPr>
-                </a:tc>
-              </a:tr>
-              <a:tr h="579120">
-                <a:tc>
-                  <a:txBody>
-                    <a:bodyPr/>
-                    <a:lstStyle/>
-                    <a:p>
-                      <a:r>
-                        <a:rPr lang="en-US" sz="1350" b="0">
-                          <a:solidFill>
-                            <a:srgbClr val="0F172A"/>
-                          </a:solidFill>
-                        </a:rPr>
-                        <a:t>Sample</a:t>
-                      </a:r>
-                      <a:endParaRPr lang="en-US" sz="1350"/>
-                    </a:p>
-                  </a:txBody>
-                  <a:tcPr>
-                    <a:solidFill>
-                      <a:srgbClr val="FFFFFF"/>
-                    </a:solidFill>
-                  </a:tcPr>
-                </a:tc>
-                <a:tc>
-                  <a:txBody>
-                    <a:bodyPr/>
-                    <a:lstStyle/>
-                    <a:p>
-                      <a:r>
-                        <a:rPr lang="en-US" sz="1350" b="0">
-                          <a:solidFill>
-                            <a:srgbClr val="0F172A"/>
-                          </a:solidFill>
-                        </a:rPr>
-                        <a:t>24</a:t>
-                      </a:r>
-                      <a:endParaRPr lang="en-US" sz="1350"/>
-                    </a:p>
-                  </a:txBody>
-                  <a:tcPr>
-                    <a:solidFill>
-                      <a:srgbClr val="FFFFFF"/>
-                    </a:solidFill>
-                  </a:tcPr>
-                </a:tc>
-                <a:tc>
-                  <a:txBody>
-                    <a:bodyPr/>
-                    <a:lstStyle/>
-                    <a:p>
-                      <a:r>
-                        <a:rPr lang="en-US" sz="1350" b="0">
-                          <a:solidFill>
-                            <a:srgbClr val="0F172A"/>
-                          </a:solidFill>
-                        </a:rPr>
-                        <a:t>24</a:t>
-                      </a:r>
-                      <a:endParaRPr lang="en-US" sz="1350"/>
-                    </a:p>
-                  </a:txBody>
-                  <a:tcPr>
-                    <a:solidFill>
-                      <a:srgbClr val="FFFFFF"/>
-                    </a:solidFill>
-                  </a:tcPr>
-                </a:tc>
-                <a:tc>
-                  <a:txBody>
-                    <a:bodyPr/>
-                    <a:lstStyle/>
-                    <a:p>
-                      <a:r>
-                        <a:rPr lang="en-US" sz="1350" b="0">
-                          <a:solidFill>
-                            <a:srgbClr val="0F172A"/>
-                          </a:solidFill>
-                        </a:rPr>
-                        <a:t>Balanced</a:t>
-                      </a:r>
-                      <a:endParaRPr lang="en-US" sz="1350"/>
-                    </a:p>
-                  </a:txBody>
-                  <a:tcPr>
-                    <a:solidFill>
-                      <a:srgbClr val="FFFFFF"/>
-                    </a:solidFill>
-                  </a:tcPr>
-                </a:tc>
-              </a:tr>
-              <a:tr h="579120">
-                <a:tc>
-                  <a:txBody>
-                    <a:bodyPr/>
-                    <a:lstStyle/>
-                    <a:p>
-                      <a:r>
-                        <a:rPr lang="en-US" sz="1350" b="0">
-                          <a:solidFill>
-                            <a:srgbClr val="0F172A"/>
-                          </a:solidFill>
-                        </a:rPr>
-                        <a:t>Window</a:t>
-                      </a:r>
-                      <a:endParaRPr lang="en-US" sz="1350"/>
-                    </a:p>
-                  </a:txBody>
-                  <a:tcPr>
-                    <a:solidFill>
-                      <a:srgbClr val="FFFFFF"/>
-                    </a:solidFill>
-                  </a:tcPr>
-                </a:tc>
-                <a:tc>
-                  <a:txBody>
-                    <a:bodyPr/>
-                    <a:lstStyle/>
-                    <a:p>
-                      <a:r>
-                        <a:rPr lang="en-US" sz="1350" b="0">
-                          <a:solidFill>
-                            <a:srgbClr val="0F172A"/>
-                          </a:solidFill>
-                        </a:rPr>
-                        <a:t>3 weeks</a:t>
-                      </a:r>
-                      <a:endParaRPr lang="en-US" sz="1350"/>
-                    </a:p>
-                  </a:txBody>
-                  <a:tcPr>
-                    <a:solidFill>
-                      <a:srgbClr val="FFFFFF"/>
-                    </a:solidFill>
-                  </a:tcPr>
-                </a:tc>
-                <a:tc>
-                  <a:txBody>
-                    <a:bodyPr/>
-                    <a:lstStyle/>
-                    <a:p>
-                      <a:r>
-                        <a:rPr lang="en-US" sz="1350" b="0">
-                          <a:solidFill>
-                            <a:srgbClr val="0F172A"/>
-                          </a:solidFill>
-                        </a:rPr>
-                        <a:t>4 weeks</a:t>
-                      </a:r>
-                      <a:endParaRPr lang="en-US" sz="1350"/>
-                    </a:p>
-                  </a:txBody>
-                  <a:tcPr>
-                    <a:solidFill>
-                      <a:srgbClr val="FFFFFF"/>
-                    </a:solidFill>
-                  </a:tcPr>
-                </a:tc>
-                <a:tc>
-                  <a:txBody>
-                    <a:bodyPr/>
-                    <a:lstStyle/>
-                    <a:p>
-                      <a:r>
-                        <a:rPr lang="en-US" sz="1350" b="0">
-                          <a:solidFill>
-                            <a:srgbClr val="0F172A"/>
-                          </a:solidFill>
-                        </a:rPr>
-                        <a:t>Pre-registered</a:t>
-                      </a:r>
-                      <a:endParaRPr lang="en-US" sz="1350"/>
-                    </a:p>
-                  </a:txBody>
-                  <a:tcPr>
-                    <a:solidFill>
-                      <a:srgbClr val="FFFFFF"/>
-                    </a:solidFill>
-                  </a:tcPr>
-                </a:tc>
-              </a:tr>
-              <a:tr h="579120">
-                <a:tc>
-                  <a:txBody>
-                    <a:bodyPr/>
-                    <a:lstStyle/>
-                    <a:p>
-                      <a:r>
-                        <a:rPr lang="en-US" sz="1350" b="0">
-                          <a:solidFill>
-                            <a:srgbClr val="0F172A"/>
-                          </a:solidFill>
-                        </a:rPr>
-                        <a:t>Measure</a:t>
-                      </a:r>
-                      <a:endParaRPr lang="en-US" sz="1350"/>
-                    </a:p>
-                  </a:txBody>
-                  <a:tcPr>
-                    <a:solidFill>
-                      <a:srgbClr val="FFFFFF"/>
-                    </a:solidFill>
-                  </a:tcPr>
-                </a:tc>
-                <a:tc>
-                  <a:txBody>
-                    <a:bodyPr/>
-                    <a:lstStyle/>
-                    <a:p>
-                      <a:r>
-                        <a:rPr lang="en-US" sz="1350" b="0">
-                          <a:solidFill>
-                            <a:srgbClr val="0F172A"/>
-                          </a:solidFill>
-                        </a:rPr>
-                        <a:t>Baseline</a:t>
-                      </a:r>
-                      <a:endParaRPr lang="en-US" sz="1350"/>
-                    </a:p>
-                  </a:txBody>
-                  <a:tcPr>
-                    <a:solidFill>
-                      <a:srgbClr val="FFFFFF"/>
-                    </a:solidFill>
-                  </a:tcPr>
-                </a:tc>
-                <a:tc>
-                  <a:txBody>
-                    <a:bodyPr/>
-                    <a:lstStyle/>
-                    <a:p>
-                      <a:r>
-                        <a:rPr lang="en-US" sz="1350" b="0">
-                          <a:solidFill>
-                            <a:srgbClr val="0F172A"/>
-                          </a:solidFill>
-                        </a:rPr>
-                        <a:t>Outcome</a:t>
-                      </a:r>
-                      <a:endParaRPr lang="en-US" sz="1350"/>
-                    </a:p>
-                  </a:txBody>
-                  <a:tcPr>
-                    <a:solidFill>
-                      <a:srgbClr val="FFFFFF"/>
-                    </a:solidFill>
-                  </a:tcPr>
-                </a:tc>
-                <a:tc>
-                  <a:txBody>
-                    <a:bodyPr/>
-                    <a:lstStyle/>
-                    <a:p>
-                      <a:r>
-                        <a:rPr lang="en-US" sz="1350" b="0">
-                          <a:solidFill>
-                            <a:srgbClr val="0F172A"/>
-                          </a:solidFill>
-                        </a:rPr>
-                        <a:t>Comparable</a:t>
-                      </a:r>
-                      <a:endParaRPr lang="en-US" sz="1350"/>
-                    </a:p>
-                  </a:txBody>
-                  <a:tcPr>
-                    <a:solidFill>
-                      <a:srgbClr val="FFFFFF"/>
-                    </a:solidFill>
-                  </a:tcPr>
-                </a:tc>
-              </a:tr>
-              <a:tr h="579120">
-                <a:tc>
-                  <a:txBody>
-                    <a:bodyPr/>
-                    <a:lstStyle/>
-                    <a:p>
-                      <a:r>
-                        <a:rPr lang="en-US" sz="1350" b="0">
-                          <a:solidFill>
-                            <a:srgbClr val="0F172A"/>
-                          </a:solidFill>
-                        </a:rPr>
-                        <a:t>Limit</a:t>
-                      </a:r>
-                      <a:endParaRPr lang="en-US" sz="1350"/>
-                    </a:p>
-                  </a:txBody>
-                  <a:tcPr>
-                    <a:solidFill>
-                      <a:srgbClr val="FFFFFF"/>
-                    </a:solidFill>
-                  </a:tcPr>
-                </a:tc>
-                <a:tc>
-                  <a:txBody>
-                    <a:bodyPr/>
-                    <a:lstStyle/>
-                    <a:p>
-                      <a:r>
-                        <a:rPr lang="en-US" sz="1350" b="0">
-                          <a:solidFill>
-                            <a:srgbClr val="0F172A"/>
-                          </a:solidFill>
-                        </a:rPr>
-                        <a:t>Local</a:t>
-                      </a:r>
-                      <a:endParaRPr lang="en-US" sz="1350"/>
-                    </a:p>
-                  </a:txBody>
-                  <a:tcPr>
-                    <a:solidFill>
-                      <a:srgbClr val="FFFFFF"/>
-                    </a:solidFill>
-                  </a:tcPr>
-                </a:tc>
-                <a:tc>
-                  <a:txBody>
-                    <a:bodyPr/>
-                    <a:lstStyle/>
-                    <a:p>
-                      <a:r>
-                        <a:rPr lang="en-US" sz="1350" b="0">
-                          <a:solidFill>
-                            <a:srgbClr val="0F172A"/>
-                          </a:solidFill>
-                        </a:rPr>
-                        <a:t>Local</a:t>
-                      </a:r>
-                      <a:endParaRPr lang="en-US" sz="1350"/>
-                    </a:p>
-                  </a:txBody>
-                  <a:tcPr>
-                    <a:solidFill>
-                      <a:srgbClr val="FFFFFF"/>
-                    </a:solidFill>
-                  </a:tcPr>
-                </a:tc>
-                <a:tc>
-                  <a:txBody>
-                    <a:bodyPr/>
-                    <a:lstStyle/>
-                    <a:p>
-                      <a:r>
-                        <a:rPr lang="en-US" sz="1350" b="0">
-                          <a:solidFill>
-                            <a:srgbClr val="0F172A"/>
-                          </a:solidFill>
-                        </a:rPr>
-                        <a:t>No generalization</a:t>
-                      </a:r>
-                      <a:endParaRPr lang="en-US" sz="1350"/>
-                    </a:p>
-                  </a:txBody>
-                  <a:tcPr>
-                    <a:solidFill>
-                      <a:srgbClr val="FFFFFF"/>
-                    </a:solidFill>
-                  </a:tcPr>
-                </a:tc>
-              </a:tr>
-            </a:tbl>
-          </a:graphicData>
-        </a:graphic>
-      </p:graphicFrame>
-      <p:sp>
-        <p:nvSpPr>
-          <p:cNvPr id="20" name="table-note-label"/>
-          <p:cNvSpPr txBox="1"/>
-          <p:nvPr/>
-        </p:nvSpPr>
-        <p:spPr>
-          <a:xfrm xmlns:a="http://schemas.openxmlformats.org/drawingml/2006/main">
-            <a:off x="9810750" y="3314700"/>
-            <a:ext cx="3429000" cy="228600"/>
+      <p:sp>
+        <p:nvSpPr>
+          <p:cNvPr id="19" name="timeline-label"/>
+          <p:cNvSpPr txBox="1"/>
+          <p:nvPr/>
+        </p:nvSpPr>
+        <p:spPr>
+          <a:xfrm xmlns:a="http://schemas.openxmlformats.org/drawingml/2006/main">
+            <a:off x="1066800" y="3238500"/>
+            <a:ext cx="4000500" cy="228600"/>
           </a:xfrm>
           <a:prstGeom xmlns:a="http://schemas.openxmlformats.org/drawingml/2006/main" prst="rect">
             <a:avLst/>
@@ -3739,123 +3263,873 @@
                 <a:latin typeface="Tahoma"/>
                 <a:ea typeface="Tahoma"/>
               </a:rPr>
-              <a:t>METHOD READ-THROUGH</a:t>
-            </a:r>
-            <a:endParaRPr lang="en-US"/>
-          </a:p>
-        </p:txBody>
-      </p:sp>
-      <p:sp>
-        <p:nvSpPr>
-          <p:cNvPr id="21" name="table-note-title"/>
-          <p:cNvSpPr txBox="1"/>
-          <p:nvPr/>
-        </p:nvSpPr>
-        <p:spPr>
-          <a:xfrm xmlns:a="http://schemas.openxmlformats.org/drawingml/2006/main">
-            <a:off x="9810750" y="3790950"/>
-            <a:ext cx="3619500" cy="819150"/>
-          </a:xfrm>
-          <a:prstGeom xmlns:a="http://schemas.openxmlformats.org/drawingml/2006/main" prst="rect">
-            <a:avLst/>
-          </a:prstGeom>
-          <a:noFill xmlns:a="http://schemas.openxmlformats.org/drawingml/2006/main"/>
-          <a:ln xmlns:a="http://schemas.openxmlformats.org/drawingml/2006/main" w="0">
-            <a:noFill/>
-          </a:ln>
-        </p:spPr>
-        <p:txBody>
-          <a:bodyPr xmlns:a="http://schemas.openxmlformats.org/drawingml/2006/main" wrap="square" lIns="0" tIns="0" rIns="0" bIns="0" anchor="t"/>
-          <a:lstStyle xmlns:a="http://schemas.openxmlformats.org/drawingml/2006/main"/>
-          <a:p xmlns:a="http://schemas.openxmlformats.org/drawingml/2006/main">
-            <a:r>
-              <a:rPr lang="en-US" sz="2100" b="1">
+              <a:t>EVOLUTION / TRANSITION</a:t>
+            </a:r>
+            <a:endParaRPr lang="en-US"/>
+          </a:p>
+        </p:txBody>
+      </p:sp>
+      <p:sp>
+        <p:nvSpPr>
+          <p:cNvPr id="20" name="timeline-axis"/>
+          <p:cNvSpPr/>
+          <p:nvPr/>
+        </p:nvSpPr>
+        <p:spPr>
+          <a:xfrm xmlns:a="http://schemas.openxmlformats.org/drawingml/2006/main">
+            <a:off x="1219200" y="4762500"/>
+            <a:ext cx="10287000" cy="0"/>
+          </a:xfrm>
+          <a:prstGeom xmlns:a="http://schemas.openxmlformats.org/drawingml/2006/main" prst="line">
+            <a:avLst/>
+          </a:prstGeom>
+          <a:noFill xmlns:a="http://schemas.openxmlformats.org/drawingml/2006/main"/>
+          <a:ln xmlns:a="http://schemas.openxmlformats.org/drawingml/2006/main" w="38100">
+            <a:solidFill>
+              <a:srgbClr val="8E8D88"/>
+            </a:solidFill>
+            <a:prstDash val="solid"/>
+          </a:ln>
+        </p:spPr>
+        <p:txBody>
+          <a:bodyPr xmlns:a="http://schemas.openxmlformats.org/drawingml/2006/main" wrap="square" lIns="0" tIns="0" rIns="0" bIns="0" anchor="t"/>
+          <a:lstStyle xmlns:a="http://schemas.openxmlformats.org/drawingml/2006/main"/>
+          <a:p xmlns:a="http://schemas.openxmlformats.org/drawingml/2006/main">
+            <a:r>
+              <a:rPr lang="en-US"/>
+              <a:t/>
+            </a:r>
+            <a:endParaRPr lang="en-US"/>
+          </a:p>
+        </p:txBody>
+      </p:sp>
+      <p:sp>
+        <p:nvSpPr>
+          <p:cNvPr id="21" name="timeline-node-0"/>
+          <p:cNvSpPr/>
+          <p:nvPr/>
+        </p:nvSpPr>
+        <p:spPr>
+          <a:xfrm xmlns:a="http://schemas.openxmlformats.org/drawingml/2006/main">
+            <a:off x="1066800" y="4610100"/>
+            <a:ext cx="304800" cy="304800"/>
+          </a:xfrm>
+          <a:prstGeom xmlns:a="http://schemas.openxmlformats.org/drawingml/2006/main" prst="ellipse">
+            <a:avLst/>
+          </a:prstGeom>
+          <a:solidFill xmlns:a="http://schemas.openxmlformats.org/drawingml/2006/main">
+            <a:srgbClr val="F2F0E7"/>
+          </a:solidFill>
+          <a:ln xmlns:a="http://schemas.openxmlformats.org/drawingml/2006/main" w="25400">
+            <a:solidFill>
+              <a:srgbClr val="222222"/>
+            </a:solidFill>
+            <a:prstDash val="solid"/>
+          </a:ln>
+        </p:spPr>
+        <p:txBody>
+          <a:bodyPr xmlns:a="http://schemas.openxmlformats.org/drawingml/2006/main" wrap="square" lIns="0" tIns="0" rIns="0" bIns="0" anchor="t"/>
+          <a:lstStyle xmlns:a="http://schemas.openxmlformats.org/drawingml/2006/main"/>
+          <a:p xmlns:a="http://schemas.openxmlformats.org/drawingml/2006/main">
+            <a:r>
+              <a:rPr lang="en-US"/>
+              <a:t/>
+            </a:r>
+            <a:endParaRPr lang="en-US"/>
+          </a:p>
+        </p:txBody>
+      </p:sp>
+      <p:sp>
+        <p:nvSpPr>
+          <p:cNvPr id="22" name="timeline-number-0"/>
+          <p:cNvSpPr txBox="1"/>
+          <p:nvPr/>
+        </p:nvSpPr>
+        <p:spPr>
+          <a:xfrm xmlns:a="http://schemas.openxmlformats.org/drawingml/2006/main">
+            <a:off x="952500" y="4076700"/>
+            <a:ext cx="533400" cy="190500"/>
+          </a:xfrm>
+          <a:prstGeom xmlns:a="http://schemas.openxmlformats.org/drawingml/2006/main" prst="rect">
+            <a:avLst/>
+          </a:prstGeom>
+          <a:noFill xmlns:a="http://schemas.openxmlformats.org/drawingml/2006/main"/>
+          <a:ln xmlns:a="http://schemas.openxmlformats.org/drawingml/2006/main" w="0">
+            <a:noFill/>
+          </a:ln>
+        </p:spPr>
+        <p:txBody>
+          <a:bodyPr xmlns:a="http://schemas.openxmlformats.org/drawingml/2006/main" wrap="square" lIns="0" tIns="0" rIns="0" bIns="0" anchor="t"/>
+          <a:lstStyle xmlns:a="http://schemas.openxmlformats.org/drawingml/2006/main"/>
+          <a:p xmlns:a="http://schemas.openxmlformats.org/drawingml/2006/main">
+            <a:pPr algn="ctr"/>
+            <a:r>
+              <a:rPr lang="en-US" sz="975" b="1">
+                <a:solidFill>
+                  <a:srgbClr val="B7A530"/>
+                </a:solidFill>
+                <a:latin typeface="Tahoma"/>
+                <a:ea typeface="Tahoma"/>
+              </a:rPr>
+              <a:t>01</a:t>
+            </a:r>
+            <a:endParaRPr lang="en-US"/>
+          </a:p>
+        </p:txBody>
+      </p:sp>
+      <p:sp>
+        <p:nvSpPr>
+          <p:cNvPr id="23" name="timeline-label-0"/>
+          <p:cNvSpPr txBox="1"/>
+          <p:nvPr/>
+        </p:nvSpPr>
+        <p:spPr>
+          <a:xfrm xmlns:a="http://schemas.openxmlformats.org/drawingml/2006/main">
+            <a:off x="533400" y="5086350"/>
+            <a:ext cx="1371600" cy="228600"/>
+          </a:xfrm>
+          <a:prstGeom xmlns:a="http://schemas.openxmlformats.org/drawingml/2006/main" prst="rect">
+            <a:avLst/>
+          </a:prstGeom>
+          <a:noFill xmlns:a="http://schemas.openxmlformats.org/drawingml/2006/main"/>
+          <a:ln xmlns:a="http://schemas.openxmlformats.org/drawingml/2006/main" w="0">
+            <a:noFill/>
+          </a:ln>
+        </p:spPr>
+        <p:txBody>
+          <a:bodyPr xmlns:a="http://schemas.openxmlformats.org/drawingml/2006/main" wrap="square" lIns="0" tIns="0" rIns="0" bIns="0" anchor="t"/>
+          <a:lstStyle xmlns:a="http://schemas.openxmlformats.org/drawingml/2006/main"/>
+          <a:p xmlns:a="http://schemas.openxmlformats.org/drawingml/2006/main">
+            <a:pPr algn="ctr"/>
+            <a:r>
+              <a:rPr lang="en-US" sz="1350" b="1">
                 <a:solidFill>
                   <a:srgbClr val="222222"/>
                 </a:solidFill>
                 <a:latin typeface="Tahoma"/>
                 <a:ea typeface="Tahoma"/>
               </a:rPr>
-              <a:t>The boundary travels with the result.</a:t>
-            </a:r>
-            <a:endParaRPr lang="en-US"/>
-          </a:p>
-        </p:txBody>
-      </p:sp>
-      <p:sp>
-        <p:nvSpPr>
-          <p:cNvPr id="22" name="table-note-rule"/>
-          <p:cNvSpPr/>
-          <p:nvPr/>
-        </p:nvSpPr>
-        <p:spPr>
-          <a:xfrm xmlns:a="http://schemas.openxmlformats.org/drawingml/2006/main">
-            <a:off x="9810750" y="5010150"/>
-            <a:ext cx="3619500" cy="0"/>
-          </a:xfrm>
-          <a:prstGeom xmlns:a="http://schemas.openxmlformats.org/drawingml/2006/main" prst="line">
-            <a:avLst/>
-          </a:prstGeom>
-          <a:noFill xmlns:a="http://schemas.openxmlformats.org/drawingml/2006/main"/>
-          <a:ln xmlns:a="http://schemas.openxmlformats.org/drawingml/2006/main" w="12700">
-            <a:solidFill>
-              <a:srgbClr val="8E8D88"/>
-            </a:solidFill>
-            <a:prstDash val="solid"/>
-          </a:ln>
-        </p:spPr>
-        <p:txBody>
-          <a:bodyPr xmlns:a="http://schemas.openxmlformats.org/drawingml/2006/main" wrap="square" lIns="0" tIns="0" rIns="0" bIns="0" anchor="t"/>
-          <a:lstStyle xmlns:a="http://schemas.openxmlformats.org/drawingml/2006/main"/>
-          <a:p xmlns:a="http://schemas.openxmlformats.org/drawingml/2006/main">
-            <a:r>
-              <a:rPr lang="en-US"/>
-              <a:t/>
-            </a:r>
-            <a:endParaRPr lang="en-US"/>
-          </a:p>
-        </p:txBody>
-      </p:sp>
-      <p:sp>
-        <p:nvSpPr>
-          <p:cNvPr id="23" name="table-note-body"/>
-          <p:cNvSpPr txBox="1"/>
-          <p:nvPr/>
-        </p:nvSpPr>
-        <p:spPr>
-          <a:xfrm xmlns:a="http://schemas.openxmlformats.org/drawingml/2006/main">
-            <a:off x="9810750" y="5276850"/>
-            <a:ext cx="3524250" cy="762000"/>
-          </a:xfrm>
-          <a:prstGeom xmlns:a="http://schemas.openxmlformats.org/drawingml/2006/main" prst="rect">
-            <a:avLst/>
-          </a:prstGeom>
-          <a:noFill xmlns:a="http://schemas.openxmlformats.org/drawingml/2006/main"/>
-          <a:ln xmlns:a="http://schemas.openxmlformats.org/drawingml/2006/main" w="0">
-            <a:noFill/>
-          </a:ln>
-        </p:spPr>
-        <p:txBody>
-          <a:bodyPr xmlns:a="http://schemas.openxmlformats.org/drawingml/2006/main" wrap="square" lIns="0" tIns="0" rIns="0" bIns="0" anchor="t"/>
-          <a:lstStyle xmlns:a="http://schemas.openxmlformats.org/drawingml/2006/main"/>
-          <a:p xmlns:a="http://schemas.openxmlformats.org/drawingml/2006/main">
-            <a:r>
-              <a:rPr lang="en-US" sz="1275">
+              <a:t>Frame</a:t>
+            </a:r>
+            <a:endParaRPr lang="en-US"/>
+          </a:p>
+        </p:txBody>
+      </p:sp>
+      <p:sp>
+        <p:nvSpPr>
+          <p:cNvPr id="24" name="timeline-text-0"/>
+          <p:cNvSpPr txBox="1"/>
+          <p:nvPr/>
+        </p:nvSpPr>
+        <p:spPr>
+          <a:xfrm xmlns:a="http://schemas.openxmlformats.org/drawingml/2006/main">
+            <a:off x="323850" y="5391150"/>
+            <a:ext cx="1790700" cy="361950"/>
+          </a:xfrm>
+          <a:prstGeom xmlns:a="http://schemas.openxmlformats.org/drawingml/2006/main" prst="rect">
+            <a:avLst/>
+          </a:prstGeom>
+          <a:noFill xmlns:a="http://schemas.openxmlformats.org/drawingml/2006/main"/>
+          <a:ln xmlns:a="http://schemas.openxmlformats.org/drawingml/2006/main" w="0">
+            <a:noFill/>
+          </a:ln>
+        </p:spPr>
+        <p:txBody>
+          <a:bodyPr xmlns:a="http://schemas.openxmlformats.org/drawingml/2006/main" wrap="square" lIns="0" tIns="0" rIns="0" bIns="0" anchor="t"/>
+          <a:lstStyle xmlns:a="http://schemas.openxmlformats.org/drawingml/2006/main"/>
+          <a:p xmlns:a="http://schemas.openxmlformats.org/drawingml/2006/main">
+            <a:pPr algn="ctr"/>
+            <a:r>
+              <a:rPr lang="en-US" sz="1050">
                 <a:solidFill>
                   <a:srgbClr val="8E8D88"/>
                 </a:solidFill>
                 <a:latin typeface="Tahoma"/>
                 <a:ea typeface="Tahoma"/>
               </a:rPr>
-              <a:t>Keep the method, window and limitation adjacent to the outcome so the reader can audit the claim.</a:t>
-            </a:r>
-            <a:endParaRPr lang="en-US"/>
-          </a:p>
-        </p:txBody>
-      </p:sp>
-      <p:sp>
-        <p:nvSpPr>
-          <p:cNvPr id="24" name="evidence-band"/>
+              <a:t>Name the question</a:t>
+            </a:r>
+            <a:endParaRPr lang="en-US"/>
+          </a:p>
+        </p:txBody>
+      </p:sp>
+      <p:sp>
+        <p:nvSpPr>
+          <p:cNvPr id="25" name="timeline-node-1"/>
+          <p:cNvSpPr/>
+          <p:nvPr/>
+        </p:nvSpPr>
+        <p:spPr>
+          <a:xfrm xmlns:a="http://schemas.openxmlformats.org/drawingml/2006/main">
+            <a:off x="3638550" y="4610100"/>
+            <a:ext cx="304800" cy="304800"/>
+          </a:xfrm>
+          <a:prstGeom xmlns:a="http://schemas.openxmlformats.org/drawingml/2006/main" prst="ellipse">
+            <a:avLst/>
+          </a:prstGeom>
+          <a:solidFill xmlns:a="http://schemas.openxmlformats.org/drawingml/2006/main">
+            <a:srgbClr val="F2F0E7"/>
+          </a:solidFill>
+          <a:ln xmlns:a="http://schemas.openxmlformats.org/drawingml/2006/main" w="25400">
+            <a:solidFill>
+              <a:srgbClr val="222222"/>
+            </a:solidFill>
+            <a:prstDash val="solid"/>
+          </a:ln>
+        </p:spPr>
+        <p:txBody>
+          <a:bodyPr xmlns:a="http://schemas.openxmlformats.org/drawingml/2006/main" wrap="square" lIns="0" tIns="0" rIns="0" bIns="0" anchor="t"/>
+          <a:lstStyle xmlns:a="http://schemas.openxmlformats.org/drawingml/2006/main"/>
+          <a:p xmlns:a="http://schemas.openxmlformats.org/drawingml/2006/main">
+            <a:r>
+              <a:rPr lang="en-US"/>
+              <a:t/>
+            </a:r>
+            <a:endParaRPr lang="en-US"/>
+          </a:p>
+        </p:txBody>
+      </p:sp>
+      <p:sp>
+        <p:nvSpPr>
+          <p:cNvPr id="26" name="timeline-number-1"/>
+          <p:cNvSpPr txBox="1"/>
+          <p:nvPr/>
+        </p:nvSpPr>
+        <p:spPr>
+          <a:xfrm xmlns:a="http://schemas.openxmlformats.org/drawingml/2006/main">
+            <a:off x="3524250" y="4076700"/>
+            <a:ext cx="533400" cy="190500"/>
+          </a:xfrm>
+          <a:prstGeom xmlns:a="http://schemas.openxmlformats.org/drawingml/2006/main" prst="rect">
+            <a:avLst/>
+          </a:prstGeom>
+          <a:noFill xmlns:a="http://schemas.openxmlformats.org/drawingml/2006/main"/>
+          <a:ln xmlns:a="http://schemas.openxmlformats.org/drawingml/2006/main" w="0">
+            <a:noFill/>
+          </a:ln>
+        </p:spPr>
+        <p:txBody>
+          <a:bodyPr xmlns:a="http://schemas.openxmlformats.org/drawingml/2006/main" wrap="square" lIns="0" tIns="0" rIns="0" bIns="0" anchor="t"/>
+          <a:lstStyle xmlns:a="http://schemas.openxmlformats.org/drawingml/2006/main"/>
+          <a:p xmlns:a="http://schemas.openxmlformats.org/drawingml/2006/main">
+            <a:pPr algn="ctr"/>
+            <a:r>
+              <a:rPr lang="en-US" sz="975" b="1">
+                <a:solidFill>
+                  <a:srgbClr val="B7A530"/>
+                </a:solidFill>
+                <a:latin typeface="Tahoma"/>
+                <a:ea typeface="Tahoma"/>
+              </a:rPr>
+              <a:t>02</a:t>
+            </a:r>
+            <a:endParaRPr lang="en-US"/>
+          </a:p>
+        </p:txBody>
+      </p:sp>
+      <p:sp>
+        <p:nvSpPr>
+          <p:cNvPr id="27" name="timeline-label-1"/>
+          <p:cNvSpPr txBox="1"/>
+          <p:nvPr/>
+        </p:nvSpPr>
+        <p:spPr>
+          <a:xfrm xmlns:a="http://schemas.openxmlformats.org/drawingml/2006/main">
+            <a:off x="3105150" y="5086350"/>
+            <a:ext cx="1371600" cy="228600"/>
+          </a:xfrm>
+          <a:prstGeom xmlns:a="http://schemas.openxmlformats.org/drawingml/2006/main" prst="rect">
+            <a:avLst/>
+          </a:prstGeom>
+          <a:noFill xmlns:a="http://schemas.openxmlformats.org/drawingml/2006/main"/>
+          <a:ln xmlns:a="http://schemas.openxmlformats.org/drawingml/2006/main" w="0">
+            <a:noFill/>
+          </a:ln>
+        </p:spPr>
+        <p:txBody>
+          <a:bodyPr xmlns:a="http://schemas.openxmlformats.org/drawingml/2006/main" wrap="square" lIns="0" tIns="0" rIns="0" bIns="0" anchor="t"/>
+          <a:lstStyle xmlns:a="http://schemas.openxmlformats.org/drawingml/2006/main"/>
+          <a:p xmlns:a="http://schemas.openxmlformats.org/drawingml/2006/main">
+            <a:pPr algn="ctr"/>
+            <a:r>
+              <a:rPr lang="en-US" sz="1350" b="1">
+                <a:solidFill>
+                  <a:srgbClr val="222222"/>
+                </a:solidFill>
+                <a:latin typeface="Tahoma"/>
+                <a:ea typeface="Tahoma"/>
+              </a:rPr>
+              <a:t>Test</a:t>
+            </a:r>
+            <a:endParaRPr lang="en-US"/>
+          </a:p>
+        </p:txBody>
+      </p:sp>
+      <p:sp>
+        <p:nvSpPr>
+          <p:cNvPr id="28" name="timeline-text-1"/>
+          <p:cNvSpPr txBox="1"/>
+          <p:nvPr/>
+        </p:nvSpPr>
+        <p:spPr>
+          <a:xfrm xmlns:a="http://schemas.openxmlformats.org/drawingml/2006/main">
+            <a:off x="2895600" y="5391150"/>
+            <a:ext cx="1790700" cy="361950"/>
+          </a:xfrm>
+          <a:prstGeom xmlns:a="http://schemas.openxmlformats.org/drawingml/2006/main" prst="rect">
+            <a:avLst/>
+          </a:prstGeom>
+          <a:noFill xmlns:a="http://schemas.openxmlformats.org/drawingml/2006/main"/>
+          <a:ln xmlns:a="http://schemas.openxmlformats.org/drawingml/2006/main" w="0">
+            <a:noFill/>
+          </a:ln>
+        </p:spPr>
+        <p:txBody>
+          <a:bodyPr xmlns:a="http://schemas.openxmlformats.org/drawingml/2006/main" wrap="square" lIns="0" tIns="0" rIns="0" bIns="0" anchor="t"/>
+          <a:lstStyle xmlns:a="http://schemas.openxmlformats.org/drawingml/2006/main"/>
+          <a:p xmlns:a="http://schemas.openxmlformats.org/drawingml/2006/main">
+            <a:pPr algn="ctr"/>
+            <a:r>
+              <a:rPr lang="en-US" sz="1050">
+                <a:solidFill>
+                  <a:srgbClr val="8E8D88"/>
+                </a:solidFill>
+                <a:latin typeface="Tahoma"/>
+                <a:ea typeface="Tahoma"/>
+              </a:rPr>
+              <a:t>Hold the rule</a:t>
+            </a:r>
+            <a:endParaRPr lang="en-US"/>
+          </a:p>
+        </p:txBody>
+      </p:sp>
+      <p:sp>
+        <p:nvSpPr>
+          <p:cNvPr id="29" name="timeline-node-2"/>
+          <p:cNvSpPr/>
+          <p:nvPr/>
+        </p:nvSpPr>
+        <p:spPr>
+          <a:xfrm xmlns:a="http://schemas.openxmlformats.org/drawingml/2006/main">
+            <a:off x="6210300" y="4610100"/>
+            <a:ext cx="304800" cy="304800"/>
+          </a:xfrm>
+          <a:prstGeom xmlns:a="http://schemas.openxmlformats.org/drawingml/2006/main" prst="ellipse">
+            <a:avLst/>
+          </a:prstGeom>
+          <a:solidFill xmlns:a="http://schemas.openxmlformats.org/drawingml/2006/main">
+            <a:srgbClr val="F2F0E7"/>
+          </a:solidFill>
+          <a:ln xmlns:a="http://schemas.openxmlformats.org/drawingml/2006/main" w="25400">
+            <a:solidFill>
+              <a:srgbClr val="222222"/>
+            </a:solidFill>
+            <a:prstDash val="solid"/>
+          </a:ln>
+        </p:spPr>
+        <p:txBody>
+          <a:bodyPr xmlns:a="http://schemas.openxmlformats.org/drawingml/2006/main" wrap="square" lIns="0" tIns="0" rIns="0" bIns="0" anchor="t"/>
+          <a:lstStyle xmlns:a="http://schemas.openxmlformats.org/drawingml/2006/main"/>
+          <a:p xmlns:a="http://schemas.openxmlformats.org/drawingml/2006/main">
+            <a:r>
+              <a:rPr lang="en-US"/>
+              <a:t/>
+            </a:r>
+            <a:endParaRPr lang="en-US"/>
+          </a:p>
+        </p:txBody>
+      </p:sp>
+      <p:sp>
+        <p:nvSpPr>
+          <p:cNvPr id="30" name="timeline-number-2"/>
+          <p:cNvSpPr txBox="1"/>
+          <p:nvPr/>
+        </p:nvSpPr>
+        <p:spPr>
+          <a:xfrm xmlns:a="http://schemas.openxmlformats.org/drawingml/2006/main">
+            <a:off x="6096000" y="4076700"/>
+            <a:ext cx="533400" cy="190500"/>
+          </a:xfrm>
+          <a:prstGeom xmlns:a="http://schemas.openxmlformats.org/drawingml/2006/main" prst="rect">
+            <a:avLst/>
+          </a:prstGeom>
+          <a:noFill xmlns:a="http://schemas.openxmlformats.org/drawingml/2006/main"/>
+          <a:ln xmlns:a="http://schemas.openxmlformats.org/drawingml/2006/main" w="0">
+            <a:noFill/>
+          </a:ln>
+        </p:spPr>
+        <p:txBody>
+          <a:bodyPr xmlns:a="http://schemas.openxmlformats.org/drawingml/2006/main" wrap="square" lIns="0" tIns="0" rIns="0" bIns="0" anchor="t"/>
+          <a:lstStyle xmlns:a="http://schemas.openxmlformats.org/drawingml/2006/main"/>
+          <a:p xmlns:a="http://schemas.openxmlformats.org/drawingml/2006/main">
+            <a:pPr algn="ctr"/>
+            <a:r>
+              <a:rPr lang="en-US" sz="975" b="1">
+                <a:solidFill>
+                  <a:srgbClr val="B7A530"/>
+                </a:solidFill>
+                <a:latin typeface="Tahoma"/>
+                <a:ea typeface="Tahoma"/>
+              </a:rPr>
+              <a:t>03</a:t>
+            </a:r>
+            <a:endParaRPr lang="en-US"/>
+          </a:p>
+        </p:txBody>
+      </p:sp>
+      <p:sp>
+        <p:nvSpPr>
+          <p:cNvPr id="31" name="timeline-label-2"/>
+          <p:cNvSpPr txBox="1"/>
+          <p:nvPr/>
+        </p:nvSpPr>
+        <p:spPr>
+          <a:xfrm xmlns:a="http://schemas.openxmlformats.org/drawingml/2006/main">
+            <a:off x="5676900" y="5086350"/>
+            <a:ext cx="1371600" cy="228600"/>
+          </a:xfrm>
+          <a:prstGeom xmlns:a="http://schemas.openxmlformats.org/drawingml/2006/main" prst="rect">
+            <a:avLst/>
+          </a:prstGeom>
+          <a:noFill xmlns:a="http://schemas.openxmlformats.org/drawingml/2006/main"/>
+          <a:ln xmlns:a="http://schemas.openxmlformats.org/drawingml/2006/main" w="0">
+            <a:noFill/>
+          </a:ln>
+        </p:spPr>
+        <p:txBody>
+          <a:bodyPr xmlns:a="http://schemas.openxmlformats.org/drawingml/2006/main" wrap="square" lIns="0" tIns="0" rIns="0" bIns="0" anchor="t"/>
+          <a:lstStyle xmlns:a="http://schemas.openxmlformats.org/drawingml/2006/main"/>
+          <a:p xmlns:a="http://schemas.openxmlformats.org/drawingml/2006/main">
+            <a:pPr algn="ctr"/>
+            <a:r>
+              <a:rPr lang="en-US" sz="1350" b="1">
+                <a:solidFill>
+                  <a:srgbClr val="222222"/>
+                </a:solidFill>
+                <a:latin typeface="Tahoma"/>
+                <a:ea typeface="Tahoma"/>
+              </a:rPr>
+              <a:t>Read</a:t>
+            </a:r>
+            <a:endParaRPr lang="en-US"/>
+          </a:p>
+        </p:txBody>
+      </p:sp>
+      <p:sp>
+        <p:nvSpPr>
+          <p:cNvPr id="32" name="timeline-text-2"/>
+          <p:cNvSpPr txBox="1"/>
+          <p:nvPr/>
+        </p:nvSpPr>
+        <p:spPr>
+          <a:xfrm xmlns:a="http://schemas.openxmlformats.org/drawingml/2006/main">
+            <a:off x="5467350" y="5391150"/>
+            <a:ext cx="1790700" cy="361950"/>
+          </a:xfrm>
+          <a:prstGeom xmlns:a="http://schemas.openxmlformats.org/drawingml/2006/main" prst="rect">
+            <a:avLst/>
+          </a:prstGeom>
+          <a:noFill xmlns:a="http://schemas.openxmlformats.org/drawingml/2006/main"/>
+          <a:ln xmlns:a="http://schemas.openxmlformats.org/drawingml/2006/main" w="0">
+            <a:noFill/>
+          </a:ln>
+        </p:spPr>
+        <p:txBody>
+          <a:bodyPr xmlns:a="http://schemas.openxmlformats.org/drawingml/2006/main" wrap="square" lIns="0" tIns="0" rIns="0" bIns="0" anchor="t"/>
+          <a:lstStyle xmlns:a="http://schemas.openxmlformats.org/drawingml/2006/main"/>
+          <a:p xmlns:a="http://schemas.openxmlformats.org/drawingml/2006/main">
+            <a:pPr algn="ctr"/>
+            <a:r>
+              <a:rPr lang="en-US" sz="1050">
+                <a:solidFill>
+                  <a:srgbClr val="8E8D88"/>
+                </a:solidFill>
+                <a:latin typeface="Tahoma"/>
+                <a:ea typeface="Tahoma"/>
+              </a:rPr>
+              <a:t>Separate signal</a:t>
+            </a:r>
+            <a:endParaRPr lang="en-US"/>
+          </a:p>
+        </p:txBody>
+      </p:sp>
+      <p:sp>
+        <p:nvSpPr>
+          <p:cNvPr id="33" name="timeline-node-3"/>
+          <p:cNvSpPr/>
+          <p:nvPr/>
+        </p:nvSpPr>
+        <p:spPr>
+          <a:xfrm xmlns:a="http://schemas.openxmlformats.org/drawingml/2006/main">
+            <a:off x="8782050" y="4610100"/>
+            <a:ext cx="304800" cy="304800"/>
+          </a:xfrm>
+          <a:prstGeom xmlns:a="http://schemas.openxmlformats.org/drawingml/2006/main" prst="ellipse">
+            <a:avLst/>
+          </a:prstGeom>
+          <a:solidFill xmlns:a="http://schemas.openxmlformats.org/drawingml/2006/main">
+            <a:srgbClr val="F2F0E7"/>
+          </a:solidFill>
+          <a:ln xmlns:a="http://schemas.openxmlformats.org/drawingml/2006/main" w="25400">
+            <a:solidFill>
+              <a:srgbClr val="222222"/>
+            </a:solidFill>
+            <a:prstDash val="solid"/>
+          </a:ln>
+        </p:spPr>
+        <p:txBody>
+          <a:bodyPr xmlns:a="http://schemas.openxmlformats.org/drawingml/2006/main" wrap="square" lIns="0" tIns="0" rIns="0" bIns="0" anchor="t"/>
+          <a:lstStyle xmlns:a="http://schemas.openxmlformats.org/drawingml/2006/main"/>
+          <a:p xmlns:a="http://schemas.openxmlformats.org/drawingml/2006/main">
+            <a:r>
+              <a:rPr lang="en-US"/>
+              <a:t/>
+            </a:r>
+            <a:endParaRPr lang="en-US"/>
+          </a:p>
+        </p:txBody>
+      </p:sp>
+      <p:sp>
+        <p:nvSpPr>
+          <p:cNvPr id="34" name="timeline-number-3"/>
+          <p:cNvSpPr txBox="1"/>
+          <p:nvPr/>
+        </p:nvSpPr>
+        <p:spPr>
+          <a:xfrm xmlns:a="http://schemas.openxmlformats.org/drawingml/2006/main">
+            <a:off x="8667750" y="4076700"/>
+            <a:ext cx="533400" cy="190500"/>
+          </a:xfrm>
+          <a:prstGeom xmlns:a="http://schemas.openxmlformats.org/drawingml/2006/main" prst="rect">
+            <a:avLst/>
+          </a:prstGeom>
+          <a:noFill xmlns:a="http://schemas.openxmlformats.org/drawingml/2006/main"/>
+          <a:ln xmlns:a="http://schemas.openxmlformats.org/drawingml/2006/main" w="0">
+            <a:noFill/>
+          </a:ln>
+        </p:spPr>
+        <p:txBody>
+          <a:bodyPr xmlns:a="http://schemas.openxmlformats.org/drawingml/2006/main" wrap="square" lIns="0" tIns="0" rIns="0" bIns="0" anchor="t"/>
+          <a:lstStyle xmlns:a="http://schemas.openxmlformats.org/drawingml/2006/main"/>
+          <a:p xmlns:a="http://schemas.openxmlformats.org/drawingml/2006/main">
+            <a:pPr algn="ctr"/>
+            <a:r>
+              <a:rPr lang="en-US" sz="975" b="1">
+                <a:solidFill>
+                  <a:srgbClr val="B7A530"/>
+                </a:solidFill>
+                <a:latin typeface="Tahoma"/>
+                <a:ea typeface="Tahoma"/>
+              </a:rPr>
+              <a:t>04</a:t>
+            </a:r>
+            <a:endParaRPr lang="en-US"/>
+          </a:p>
+        </p:txBody>
+      </p:sp>
+      <p:sp>
+        <p:nvSpPr>
+          <p:cNvPr id="35" name="timeline-label-3"/>
+          <p:cNvSpPr txBox="1"/>
+          <p:nvPr/>
+        </p:nvSpPr>
+        <p:spPr>
+          <a:xfrm xmlns:a="http://schemas.openxmlformats.org/drawingml/2006/main">
+            <a:off x="8248650" y="5086350"/>
+            <a:ext cx="1371600" cy="228600"/>
+          </a:xfrm>
+          <a:prstGeom xmlns:a="http://schemas.openxmlformats.org/drawingml/2006/main" prst="rect">
+            <a:avLst/>
+          </a:prstGeom>
+          <a:noFill xmlns:a="http://schemas.openxmlformats.org/drawingml/2006/main"/>
+          <a:ln xmlns:a="http://schemas.openxmlformats.org/drawingml/2006/main" w="0">
+            <a:noFill/>
+          </a:ln>
+        </p:spPr>
+        <p:txBody>
+          <a:bodyPr xmlns:a="http://schemas.openxmlformats.org/drawingml/2006/main" wrap="square" lIns="0" tIns="0" rIns="0" bIns="0" anchor="t"/>
+          <a:lstStyle xmlns:a="http://schemas.openxmlformats.org/drawingml/2006/main"/>
+          <a:p xmlns:a="http://schemas.openxmlformats.org/drawingml/2006/main">
+            <a:pPr algn="ctr"/>
+            <a:r>
+              <a:rPr lang="en-US" sz="1350" b="1">
+                <a:solidFill>
+                  <a:srgbClr val="222222"/>
+                </a:solidFill>
+                <a:latin typeface="Tahoma"/>
+                <a:ea typeface="Tahoma"/>
+              </a:rPr>
+              <a:t>Move</a:t>
+            </a:r>
+            <a:endParaRPr lang="en-US"/>
+          </a:p>
+        </p:txBody>
+      </p:sp>
+      <p:sp>
+        <p:nvSpPr>
+          <p:cNvPr id="36" name="timeline-text-3"/>
+          <p:cNvSpPr txBox="1"/>
+          <p:nvPr/>
+        </p:nvSpPr>
+        <p:spPr>
+          <a:xfrm xmlns:a="http://schemas.openxmlformats.org/drawingml/2006/main">
+            <a:off x="8039100" y="5391150"/>
+            <a:ext cx="1790700" cy="361950"/>
+          </a:xfrm>
+          <a:prstGeom xmlns:a="http://schemas.openxmlformats.org/drawingml/2006/main" prst="rect">
+            <a:avLst/>
+          </a:prstGeom>
+          <a:noFill xmlns:a="http://schemas.openxmlformats.org/drawingml/2006/main"/>
+          <a:ln xmlns:a="http://schemas.openxmlformats.org/drawingml/2006/main" w="0">
+            <a:noFill/>
+          </a:ln>
+        </p:spPr>
+        <p:txBody>
+          <a:bodyPr xmlns:a="http://schemas.openxmlformats.org/drawingml/2006/main" wrap="square" lIns="0" tIns="0" rIns="0" bIns="0" anchor="t"/>
+          <a:lstStyle xmlns:a="http://schemas.openxmlformats.org/drawingml/2006/main"/>
+          <a:p xmlns:a="http://schemas.openxmlformats.org/drawingml/2006/main">
+            <a:pPr algn="ctr"/>
+            <a:r>
+              <a:rPr lang="en-US" sz="1050">
+                <a:solidFill>
+                  <a:srgbClr val="8E8D88"/>
+                </a:solidFill>
+                <a:latin typeface="Tahoma"/>
+                <a:ea typeface="Tahoma"/>
+              </a:rPr>
+              <a:t>Set the next gate</a:t>
+            </a:r>
+            <a:endParaRPr lang="en-US"/>
+          </a:p>
+        </p:txBody>
+      </p:sp>
+      <p:sp>
+        <p:nvSpPr>
+          <p:cNvPr id="37" name="timeline-node-4"/>
+          <p:cNvSpPr/>
+          <p:nvPr/>
+        </p:nvSpPr>
+        <p:spPr>
+          <a:xfrm xmlns:a="http://schemas.openxmlformats.org/drawingml/2006/main">
+            <a:off x="11353800" y="4610100"/>
+            <a:ext cx="304800" cy="304800"/>
+          </a:xfrm>
+          <a:prstGeom xmlns:a="http://schemas.openxmlformats.org/drawingml/2006/main" prst="ellipse">
+            <a:avLst/>
+          </a:prstGeom>
+          <a:solidFill xmlns:a="http://schemas.openxmlformats.org/drawingml/2006/main">
+            <a:srgbClr val="B7A530"/>
+          </a:solidFill>
+          <a:ln xmlns:a="http://schemas.openxmlformats.org/drawingml/2006/main" w="25400">
+            <a:solidFill>
+              <a:srgbClr val="B7A530"/>
+            </a:solidFill>
+            <a:prstDash val="solid"/>
+          </a:ln>
+        </p:spPr>
+        <p:txBody>
+          <a:bodyPr xmlns:a="http://schemas.openxmlformats.org/drawingml/2006/main" wrap="square" lIns="0" tIns="0" rIns="0" bIns="0" anchor="t"/>
+          <a:lstStyle xmlns:a="http://schemas.openxmlformats.org/drawingml/2006/main"/>
+          <a:p xmlns:a="http://schemas.openxmlformats.org/drawingml/2006/main">
+            <a:r>
+              <a:rPr lang="en-US"/>
+              <a:t/>
+            </a:r>
+            <a:endParaRPr lang="en-US"/>
+          </a:p>
+        </p:txBody>
+      </p:sp>
+      <p:sp>
+        <p:nvSpPr>
+          <p:cNvPr id="38" name="timeline-number-4"/>
+          <p:cNvSpPr txBox="1"/>
+          <p:nvPr/>
+        </p:nvSpPr>
+        <p:spPr>
+          <a:xfrm xmlns:a="http://schemas.openxmlformats.org/drawingml/2006/main">
+            <a:off x="11239500" y="4076700"/>
+            <a:ext cx="533400" cy="190500"/>
+          </a:xfrm>
+          <a:prstGeom xmlns:a="http://schemas.openxmlformats.org/drawingml/2006/main" prst="rect">
+            <a:avLst/>
+          </a:prstGeom>
+          <a:noFill xmlns:a="http://schemas.openxmlformats.org/drawingml/2006/main"/>
+          <a:ln xmlns:a="http://schemas.openxmlformats.org/drawingml/2006/main" w="0">
+            <a:noFill/>
+          </a:ln>
+        </p:spPr>
+        <p:txBody>
+          <a:bodyPr xmlns:a="http://schemas.openxmlformats.org/drawingml/2006/main" wrap="square" lIns="0" tIns="0" rIns="0" bIns="0" anchor="t"/>
+          <a:lstStyle xmlns:a="http://schemas.openxmlformats.org/drawingml/2006/main"/>
+          <a:p xmlns:a="http://schemas.openxmlformats.org/drawingml/2006/main">
+            <a:pPr algn="ctr"/>
+            <a:r>
+              <a:rPr lang="en-US" sz="975" b="1">
+                <a:solidFill>
+                  <a:srgbClr val="B7A530"/>
+                </a:solidFill>
+                <a:latin typeface="Tahoma"/>
+                <a:ea typeface="Tahoma"/>
+              </a:rPr>
+              <a:t>05</a:t>
+            </a:r>
+            <a:endParaRPr lang="en-US"/>
+          </a:p>
+        </p:txBody>
+      </p:sp>
+      <p:sp>
+        <p:nvSpPr>
+          <p:cNvPr id="39" name="timeline-label-4"/>
+          <p:cNvSpPr txBox="1"/>
+          <p:nvPr/>
+        </p:nvSpPr>
+        <p:spPr>
+          <a:xfrm xmlns:a="http://schemas.openxmlformats.org/drawingml/2006/main">
+            <a:off x="10820400" y="5086350"/>
+            <a:ext cx="1371600" cy="228600"/>
+          </a:xfrm>
+          <a:prstGeom xmlns:a="http://schemas.openxmlformats.org/drawingml/2006/main" prst="rect">
+            <a:avLst/>
+          </a:prstGeom>
+          <a:noFill xmlns:a="http://schemas.openxmlformats.org/drawingml/2006/main"/>
+          <a:ln xmlns:a="http://schemas.openxmlformats.org/drawingml/2006/main" w="0">
+            <a:noFill/>
+          </a:ln>
+        </p:spPr>
+        <p:txBody>
+          <a:bodyPr xmlns:a="http://schemas.openxmlformats.org/drawingml/2006/main" wrap="square" lIns="0" tIns="0" rIns="0" bIns="0" anchor="t"/>
+          <a:lstStyle xmlns:a="http://schemas.openxmlformats.org/drawingml/2006/main"/>
+          <a:p xmlns:a="http://schemas.openxmlformats.org/drawingml/2006/main">
+            <a:pPr algn="ctr"/>
+            <a:r>
+              <a:rPr lang="en-US" sz="1350" b="1">
+                <a:solidFill>
+                  <a:srgbClr val="222222"/>
+                </a:solidFill>
+                <a:latin typeface="Tahoma"/>
+                <a:ea typeface="Tahoma"/>
+              </a:rPr>
+              <a:t>Scale</a:t>
+            </a:r>
+            <a:endParaRPr lang="en-US"/>
+          </a:p>
+        </p:txBody>
+      </p:sp>
+      <p:sp>
+        <p:nvSpPr>
+          <p:cNvPr id="40" name="timeline-text-4"/>
+          <p:cNvSpPr txBox="1"/>
+          <p:nvPr/>
+        </p:nvSpPr>
+        <p:spPr>
+          <a:xfrm xmlns:a="http://schemas.openxmlformats.org/drawingml/2006/main">
+            <a:off x="10610850" y="5391150"/>
+            <a:ext cx="1790700" cy="361950"/>
+          </a:xfrm>
+          <a:prstGeom xmlns:a="http://schemas.openxmlformats.org/drawingml/2006/main" prst="rect">
+            <a:avLst/>
+          </a:prstGeom>
+          <a:noFill xmlns:a="http://schemas.openxmlformats.org/drawingml/2006/main"/>
+          <a:ln xmlns:a="http://schemas.openxmlformats.org/drawingml/2006/main" w="0">
+            <a:noFill/>
+          </a:ln>
+        </p:spPr>
+        <p:txBody>
+          <a:bodyPr xmlns:a="http://schemas.openxmlformats.org/drawingml/2006/main" wrap="square" lIns="0" tIns="0" rIns="0" bIns="0" anchor="t"/>
+          <a:lstStyle xmlns:a="http://schemas.openxmlformats.org/drawingml/2006/main"/>
+          <a:p xmlns:a="http://schemas.openxmlformats.org/drawingml/2006/main">
+            <a:pPr algn="ctr"/>
+            <a:r>
+              <a:rPr lang="en-US" sz="1050">
+                <a:solidFill>
+                  <a:srgbClr val="8E8D88"/>
+                </a:solidFill>
+                <a:latin typeface="Tahoma"/>
+                <a:ea typeface="Tahoma"/>
+              </a:rPr>
+              <a:t>Repeat what held</a:t>
+            </a:r>
+            <a:endParaRPr lang="en-US"/>
+          </a:p>
+        </p:txBody>
+      </p:sp>
+      <p:sp>
+        <p:nvSpPr>
+          <p:cNvPr id="41" name="timeline-read-label"/>
+          <p:cNvSpPr txBox="1"/>
+          <p:nvPr/>
+        </p:nvSpPr>
+        <p:spPr>
+          <a:xfrm xmlns:a="http://schemas.openxmlformats.org/drawingml/2006/main">
+            <a:off x="1066800" y="6667500"/>
+            <a:ext cx="2286000" cy="209550"/>
+          </a:xfrm>
+          <a:prstGeom xmlns:a="http://schemas.openxmlformats.org/drawingml/2006/main" prst="rect">
+            <a:avLst/>
+          </a:prstGeom>
+          <a:noFill xmlns:a="http://schemas.openxmlformats.org/drawingml/2006/main"/>
+          <a:ln xmlns:a="http://schemas.openxmlformats.org/drawingml/2006/main" w="0">
+            <a:noFill/>
+          </a:ln>
+        </p:spPr>
+        <p:txBody>
+          <a:bodyPr xmlns:a="http://schemas.openxmlformats.org/drawingml/2006/main" wrap="square" lIns="0" tIns="0" rIns="0" bIns="0" anchor="t"/>
+          <a:lstStyle xmlns:a="http://schemas.openxmlformats.org/drawingml/2006/main"/>
+          <a:p xmlns:a="http://schemas.openxmlformats.org/drawingml/2006/main">
+            <a:r>
+              <a:rPr lang="en-US" sz="1050" b="1">
+                <a:solidFill>
+                  <a:srgbClr val="B7A530"/>
+                </a:solidFill>
+                <a:latin typeface="Tahoma"/>
+                <a:ea typeface="Tahoma"/>
+              </a:rPr>
+              <a:t>READ-THROUGH</a:t>
+            </a:r>
+            <a:endParaRPr lang="en-US"/>
+          </a:p>
+        </p:txBody>
+      </p:sp>
+      <p:sp>
+        <p:nvSpPr>
+          <p:cNvPr id="42" name="timeline-read"/>
+          <p:cNvSpPr txBox="1"/>
+          <p:nvPr/>
+        </p:nvSpPr>
+        <p:spPr>
+          <a:xfrm xmlns:a="http://schemas.openxmlformats.org/drawingml/2006/main">
+            <a:off x="3333750" y="6629400"/>
+            <a:ext cx="8191500" cy="266700"/>
+          </a:xfrm>
+          <a:prstGeom xmlns:a="http://schemas.openxmlformats.org/drawingml/2006/main" prst="rect">
+            <a:avLst/>
+          </a:prstGeom>
+          <a:noFill xmlns:a="http://schemas.openxmlformats.org/drawingml/2006/main"/>
+          <a:ln xmlns:a="http://schemas.openxmlformats.org/drawingml/2006/main" w="0">
+            <a:noFill/>
+          </a:ln>
+        </p:spPr>
+        <p:txBody>
+          <a:bodyPr xmlns:a="http://schemas.openxmlformats.org/drawingml/2006/main" wrap="square" lIns="0" tIns="0" rIns="0" bIns="0" anchor="t"/>
+          <a:lstStyle xmlns:a="http://schemas.openxmlformats.org/drawingml/2006/main"/>
+          <a:p xmlns:a="http://schemas.openxmlformats.org/drawingml/2006/main">
+            <a:r>
+              <a:rPr lang="en-US" sz="1425" b="1">
+                <a:solidFill>
+                  <a:srgbClr val="222222"/>
+                </a:solidFill>
+                <a:latin typeface="Tahoma"/>
+                <a:ea typeface="Tahoma"/>
+              </a:rPr>
+              <a:t>A sequence is useful when each handoff changes what can happen next.</a:t>
+            </a:r>
+            <a:endParaRPr lang="en-US"/>
+          </a:p>
+        </p:txBody>
+      </p:sp>
+      <p:sp>
+        <p:nvSpPr>
+          <p:cNvPr id="43" name="evidence-band"/>
           <p:cNvSpPr/>
           <p:nvPr/>
         </p:nvSpPr>
@@ -3891,7 +4165,7 @@
       </p:sp>
       <p:sp>
         <p:nvSpPr>
-          <p:cNvPr id="25" name="evidence-band-text"/>
+          <p:cNvPr id="44" name="evidence-band-text"/>
           <p:cNvSpPr txBox="1"/>
           <p:nvPr/>
         </p:nvSpPr>
@@ -3928,7 +4202,7 @@
       </p:sp>
       <p:sp>
         <p:nvSpPr>
-          <p:cNvPr id="26" name="source"/>
+          <p:cNvPr id="45" name="source"/>
           <p:cNvSpPr txBox="1"/>
           <p:nvPr/>
         </p:nvSpPr>
@@ -3965,7 +4239,7 @@
       </p:sp>
       <p:sp>
         <p:nvSpPr>
-          <p:cNvPr id="27" name="page-number"/>
+          <p:cNvPr id="46" name="page-number"/>
           <p:cNvSpPr txBox="1"/>
           <p:nvPr/>
         </p:nvSpPr>
@@ -4771,7 +5045,7 @@
           <p:nvPr/>
         </p:nvPicPr>
         <p:blipFill>
-          <a:blip xmlns:r="http://schemas.openxmlformats.org/officeDocument/2006/relationships" xmlns:a="http://schemas.openxmlformats.org/drawingml/2006/main" r:embed="rIdOfficeKitImage026be3a43029630d_1"/>
+          <a:blip xmlns:r="http://schemas.openxmlformats.org/officeDocument/2006/relationships" xmlns:a="http://schemas.openxmlformats.org/drawingml/2006/main" r:embed="rIdOfficeKitImagee930dcb9c6b95953_1"/>
           <a:srcRect xmlns:a="http://schemas.openxmlformats.org/drawingml/2006/main" l="0" t="34001" r="0" b="34001"/>
           <a:stretch xmlns:a="http://schemas.openxmlformats.org/drawingml/2006/main">
             <a:fillRect/>
@@ -4945,7 +5219,7 @@
           <p:nvPr/>
         </p:nvPicPr>
         <p:blipFill>
-          <a:blip xmlns:r="http://schemas.openxmlformats.org/officeDocument/2006/relationships" xmlns:a="http://schemas.openxmlformats.org/drawingml/2006/main" r:embed="rIdOfficeKitImage083106afebc7d419_1"/>
+          <a:blip xmlns:r="http://schemas.openxmlformats.org/officeDocument/2006/relationships" xmlns:a="http://schemas.openxmlformats.org/drawingml/2006/main" r:embed="rIdOfficeKitImage10e4539a68783891_1"/>
           <a:srcRect xmlns:a="http://schemas.openxmlformats.org/drawingml/2006/main" l="0" t="34001" r="0" b="34001"/>
           <a:stretch xmlns:a="http://schemas.openxmlformats.org/drawingml/2006/main">
             <a:fillRect/>
@@ -5119,7 +5393,7 @@
           <p:nvPr/>
         </p:nvPicPr>
         <p:blipFill>
-          <a:blip xmlns:r="http://schemas.openxmlformats.org/officeDocument/2006/relationships" xmlns:a="http://schemas.openxmlformats.org/drawingml/2006/main" r:embed="rIdOfficeKitImagebdd32fb5cfa65986_1"/>
+          <a:blip xmlns:r="http://schemas.openxmlformats.org/officeDocument/2006/relationships" xmlns:a="http://schemas.openxmlformats.org/drawingml/2006/main" r:embed="rIdOfficeKitImagea68aebf613832e5f_1"/>
           <a:srcRect xmlns:a="http://schemas.openxmlformats.org/drawingml/2006/main" l="0" t="34001" r="0" b="34001"/>
           <a:stretch xmlns:a="http://schemas.openxmlformats.org/drawingml/2006/main">
             <a:fillRect/>
@@ -5293,7 +5567,7 @@
           <p:nvPr/>
         </p:nvPicPr>
         <p:blipFill>
-          <a:blip xmlns:r="http://schemas.openxmlformats.org/officeDocument/2006/relationships" xmlns:a="http://schemas.openxmlformats.org/drawingml/2006/main" r:embed="rIdOfficeKitImage092dd3ee80187530_1"/>
+          <a:blip xmlns:r="http://schemas.openxmlformats.org/officeDocument/2006/relationships" xmlns:a="http://schemas.openxmlformats.org/drawingml/2006/main" r:embed="rIdOfficeKitImage5e425a7c66b022d4_1"/>
           <a:srcRect xmlns:a="http://schemas.openxmlformats.org/drawingml/2006/main" l="0" t="34001" r="0" b="34001"/>
           <a:stretch xmlns:a="http://schemas.openxmlformats.org/drawingml/2006/main">
             <a:fillRect/>
@@ -5469,7 +5743,7 @@
     <p:bg>
       <p:bgPr>
         <a:blipFill xmlns:a="http://schemas.openxmlformats.org/drawingml/2006/main">
-          <a:blip xmlns:r="http://schemas.openxmlformats.org/officeDocument/2006/relationships" r:embed="rIdOfficeKitImaged3ade97fd9ca0fdd_1"/>
+          <a:blip xmlns:r="http://schemas.openxmlformats.org/officeDocument/2006/relationships" r:embed="rIdOfficeKitImage20fc6993425855c3_1"/>
           <a:stretch>
             <a:fillRect/>
           </a:stretch>
